--- a/COMP4200_FinalPresentation.pptx
+++ b/COMP4200_FinalPresentation.pptx
@@ -9,8 +9,12 @@
     <p:sldId id="257" r:id="rId3"/>
     <p:sldId id="258" r:id="rId4"/>
     <p:sldId id="259" r:id="rId5"/>
-    <p:sldId id="260" r:id="rId6"/>
-    <p:sldId id="261" r:id="rId7"/>
+    <p:sldId id="263" r:id="rId6"/>
+    <p:sldId id="264" r:id="rId7"/>
+    <p:sldId id="265" r:id="rId8"/>
+    <p:sldId id="266" r:id="rId9"/>
+    <p:sldId id="261" r:id="rId10"/>
+    <p:sldId id="262" r:id="rId11"/>
   </p:sldIdLst>
   <p:sldSz cx="12192000" cy="6858000"/>
   <p:notesSz cx="6858000" cy="9144000"/>
@@ -109,7 +113,20 @@
       </a:defRPr>
     </a:lvl9pPr>
   </p:defaultTextStyle>
+  <p:extLst>
+    <p:ext uri="{EFAFB233-063F-42B5-8137-9DF3F51BA10A}">
+      <p15:sldGuideLst xmlns:p15="http://schemas.microsoft.com/office/powerpoint/2012/main"/>
+    </p:ext>
+  </p:extLst>
 </p:presentation>
+</file>
+
+<file path=ppt/revisionInfo.xml><?xml version="1.0" encoding="utf-8"?>
+<p1510:revInfo xmlns:a="http://schemas.openxmlformats.org/drawingml/2006/main" xmlns:r="http://schemas.openxmlformats.org/officeDocument/2006/relationships" xmlns:p1510="http://schemas.microsoft.com/office/powerpoint/2015/10/main">
+  <p1510:revLst>
+    <p1510:client id="{AB7EBE7D-8E33-B652-6438-1545BADB049E}" v="553" dt="2026-03-26T21:14:26.574"/>
+  </p1510:revLst>
+</p1510:revInfo>
 </file>
 
 <file path=ppt/slideLayouts/slideLayout1.xml><?xml version="1.0" encoding="utf-8"?>
@@ -3404,12 +3421,21 @@
         <p:spPr>
           <a:xfrm>
             <a:off x="1524000" y="4353718"/>
-            <a:ext cx="9144000" cy="723074"/>
+            <a:ext cx="9144000" cy="973976"/>
           </a:xfrm>
         </p:spPr>
         <p:txBody>
-          <a:bodyPr/>
+          <a:bodyPr vert="horz" lIns="91440" tIns="45720" rIns="91440" bIns="45720" rtlCol="0" anchor="t">
+            <a:normAutofit fontScale="92500" lnSpcReduction="10000"/>
+          </a:bodyPr>
           <a:lstStyle/>
+          <a:p>
+            <a:r>
+              <a:rPr lang="en-CA"/>
+              <a:t>Group 8</a:t>
+            </a:r>
+            <a:endParaRPr lang="en-CA" dirty="0"/>
+          </a:p>
           <a:p>
             <a:r>
               <a:rPr lang="en-CA" dirty="0"/>
@@ -3423,6 +3449,7 @@
               <a:rPr lang="en-CA" dirty="0"/>
               <a:t> Rahman</a:t>
             </a:r>
+            <a:endParaRPr lang="en-CA"/>
           </a:p>
           <a:p>
             <a:pPr>
@@ -3480,6 +3507,205 @@
 </p:sld>
 </file>
 
+<file path=ppt/slides/slide10.xml><?xml version="1.0" encoding="utf-8"?>
+<p:sld xmlns:a="http://schemas.openxmlformats.org/drawingml/2006/main" xmlns:r="http://schemas.openxmlformats.org/officeDocument/2006/relationships" xmlns:p="http://schemas.openxmlformats.org/presentationml/2006/main">
+  <p:cSld>
+    <p:spTree>
+      <p:nvGrpSpPr>
+        <p:cNvPr id="1" name=""/>
+        <p:cNvGrpSpPr/>
+        <p:nvPr/>
+      </p:nvGrpSpPr>
+      <p:grpSpPr>
+        <a:xfrm>
+          <a:off x="0" y="0"/>
+          <a:ext cx="0" cy="0"/>
+          <a:chOff x="0" y="0"/>
+          <a:chExt cx="0" cy="0"/>
+        </a:xfrm>
+      </p:grpSpPr>
+      <p:sp>
+        <p:nvSpPr>
+          <p:cNvPr id="2" name="Title 1">
+            <a:extLst>
+              <a:ext uri="{FF2B5EF4-FFF2-40B4-BE49-F238E27FC236}">
+                <a16:creationId xmlns:a16="http://schemas.microsoft.com/office/drawing/2014/main" id="{0E466D8E-7C92-1F9F-2D88-DDE1C39AEA0D}"/>
+              </a:ext>
+            </a:extLst>
+          </p:cNvPr>
+          <p:cNvSpPr>
+            <a:spLocks noGrp="1"/>
+          </p:cNvSpPr>
+          <p:nvPr>
+            <p:ph type="title"/>
+          </p:nvPr>
+        </p:nvSpPr>
+        <p:spPr/>
+        <p:txBody>
+          <a:bodyPr/>
+          <a:lstStyle/>
+          <a:p>
+            <a:r>
+              <a:rPr lang="en-CA" sz="6000">
+                <a:latin typeface="Amasis MT Pro Black"/>
+                <a:ea typeface="+mj-lt"/>
+                <a:cs typeface="+mj-lt"/>
+              </a:rPr>
+              <a:t>Future Scope</a:t>
+            </a:r>
+            <a:endParaRPr lang="en-US"/>
+          </a:p>
+        </p:txBody>
+      </p:sp>
+      <p:sp>
+        <p:nvSpPr>
+          <p:cNvPr id="3" name="Content Placeholder 2">
+            <a:extLst>
+              <a:ext uri="{FF2B5EF4-FFF2-40B4-BE49-F238E27FC236}">
+                <a16:creationId xmlns:a16="http://schemas.microsoft.com/office/drawing/2014/main" id="{EAFFF99C-BC67-0B8D-724C-1B71E4DF4292}"/>
+              </a:ext>
+            </a:extLst>
+          </p:cNvPr>
+          <p:cNvSpPr>
+            <a:spLocks noGrp="1"/>
+          </p:cNvSpPr>
+          <p:nvPr>
+            <p:ph idx="1"/>
+          </p:nvPr>
+        </p:nvSpPr>
+        <p:spPr>
+          <a:xfrm>
+            <a:off x="838200" y="1266825"/>
+            <a:ext cx="10515600" cy="4910138"/>
+          </a:xfrm>
+        </p:spPr>
+        <p:txBody>
+          <a:bodyPr vert="horz" lIns="91440" tIns="45720" rIns="91440" bIns="45720" rtlCol="0" anchor="t">
+            <a:normAutofit/>
+          </a:bodyPr>
+          <a:lstStyle/>
+          <a:p>
+            <a:pPr marL="0" indent="0">
+              <a:buNone/>
+            </a:pPr>
+            <a:r>
+              <a:rPr lang="en-US" sz="3200" b="1" i="1">
+                <a:ea typeface="+mn-lt"/>
+                <a:cs typeface="+mn-lt"/>
+              </a:rPr>
+              <a:t>Ways to Improve</a:t>
+            </a:r>
+            <a:endParaRPr lang="en-US" sz="3200">
+              <a:ea typeface="+mn-lt"/>
+              <a:cs typeface="+mn-lt"/>
+            </a:endParaRPr>
+          </a:p>
+          <a:p>
+            <a:pPr marL="0" indent="0">
+              <a:buNone/>
+            </a:pPr>
+            <a:endParaRPr lang="en-US" b="1" i="1" dirty="0"/>
+          </a:p>
+          <a:p>
+            <a:pPr>
+              <a:buFont typeface="Arial"/>
+              <a:buChar char="•"/>
+            </a:pPr>
+            <a:r>
+              <a:rPr lang="en-US">
+                <a:ea typeface="+mn-lt"/>
+                <a:cs typeface="+mn-lt"/>
+              </a:rPr>
+              <a:t>Add login via Google</a:t>
+            </a:r>
+            <a:endParaRPr lang="en-US"/>
+          </a:p>
+          <a:p>
+            <a:pPr>
+              <a:buFont typeface="Arial"/>
+              <a:buChar char="•"/>
+            </a:pPr>
+            <a:r>
+              <a:rPr lang="en-US">
+                <a:ea typeface="+mn-lt"/>
+                <a:cs typeface="+mn-lt"/>
+              </a:rPr>
+              <a:t>Setup a cloud sync database to access schedule across devices</a:t>
+            </a:r>
+            <a:endParaRPr lang="en-US"/>
+          </a:p>
+          <a:p>
+            <a:pPr>
+              <a:buFont typeface="Arial"/>
+              <a:buChar char="•"/>
+            </a:pPr>
+            <a:r>
+              <a:rPr lang="en-US">
+                <a:ea typeface="+mn-lt"/>
+                <a:cs typeface="+mn-lt"/>
+              </a:rPr>
+              <a:t>Push notifications as reminders</a:t>
+            </a:r>
+            <a:endParaRPr lang="en-US"/>
+          </a:p>
+          <a:p>
+            <a:pPr>
+              <a:buFont typeface="Arial"/>
+              <a:buChar char="•"/>
+            </a:pPr>
+            <a:r>
+              <a:rPr lang="en-US">
+                <a:ea typeface="+mn-lt"/>
+                <a:cs typeface="+mn-lt"/>
+              </a:rPr>
+              <a:t>Add a calendar view</a:t>
+            </a:r>
+            <a:endParaRPr lang="en-US"/>
+          </a:p>
+          <a:p>
+            <a:pPr>
+              <a:buFont typeface="Arial"/>
+              <a:buChar char="•"/>
+            </a:pPr>
+            <a:r>
+              <a:rPr lang="en-US">
+                <a:ea typeface="+mn-lt"/>
+                <a:cs typeface="+mn-lt"/>
+              </a:rPr>
+              <a:t>Publish app to the Google Play Store</a:t>
+            </a:r>
+            <a:endParaRPr lang="en-US" dirty="0">
+              <a:ea typeface="+mn-lt"/>
+              <a:cs typeface="+mn-lt"/>
+            </a:endParaRPr>
+          </a:p>
+          <a:p>
+            <a:pPr marL="0" indent="0">
+              <a:buNone/>
+            </a:pPr>
+            <a:endParaRPr lang="en-US" dirty="0"/>
+          </a:p>
+          <a:p>
+            <a:pPr marL="0" indent="0">
+              <a:buNone/>
+            </a:pPr>
+            <a:endParaRPr lang="en-US" dirty="0"/>
+          </a:p>
+        </p:txBody>
+      </p:sp>
+    </p:spTree>
+    <p:extLst>
+      <p:ext uri="{BB962C8B-B14F-4D97-AF65-F5344CB8AC3E}">
+        <p14:creationId xmlns:p14="http://schemas.microsoft.com/office/powerpoint/2010/main" val="2716493947"/>
+      </p:ext>
+    </p:extLst>
+  </p:cSld>
+  <p:clrMapOvr>
+    <a:masterClrMapping/>
+  </p:clrMapOvr>
+</p:sld>
+</file>
+
 <file path=ppt/slides/slide2.xml><?xml version="1.0" encoding="utf-8"?>
 <p:sld xmlns:a="http://schemas.openxmlformats.org/drawingml/2006/main" xmlns:r="http://schemas.openxmlformats.org/officeDocument/2006/relationships" xmlns:p="http://schemas.openxmlformats.org/presentationml/2006/main">
   <p:cSld>
@@ -3518,7 +3744,15 @@
           <a:bodyPr/>
           <a:lstStyle/>
           <a:p>
-            <a:endParaRPr lang="en-CA" dirty="0"/>
+            <a:r>
+              <a:rPr lang="en-CA" sz="6000">
+                <a:latin typeface="Amasis MT Pro Black"/>
+                <a:ea typeface="+mj-lt"/>
+                <a:cs typeface="+mj-lt"/>
+              </a:rPr>
+              <a:t>Motivation</a:t>
+            </a:r>
+            <a:endParaRPr lang="en-US"/>
           </a:p>
         </p:txBody>
       </p:sp>
@@ -3538,12 +3772,115 @@
             <p:ph idx="1"/>
           </p:nvPr>
         </p:nvSpPr>
-        <p:spPr/>
-        <p:txBody>
-          <a:bodyPr/>
+        <p:spPr>
+          <a:xfrm>
+            <a:off x="838200" y="1327785"/>
+            <a:ext cx="11013440" cy="4849178"/>
+          </a:xfrm>
+        </p:spPr>
+        <p:txBody>
+          <a:bodyPr vert="horz" lIns="91440" tIns="45720" rIns="91440" bIns="45720" rtlCol="0" anchor="t">
+            <a:normAutofit/>
+          </a:bodyPr>
           <a:lstStyle/>
           <a:p>
+            <a:pPr marL="0" indent="0">
+              <a:buNone/>
+            </a:pPr>
+            <a:r>
+              <a:rPr lang="en-CA" sz="3200" b="1" i="1">
+                <a:ea typeface="+mn-lt"/>
+                <a:cs typeface="+mn-lt"/>
+              </a:rPr>
+              <a:t>Why did we choose this project?</a:t>
+            </a:r>
+          </a:p>
+          <a:p>
+            <a:pPr marL="0" indent="0">
+              <a:buNone/>
+            </a:pPr>
+            <a:endParaRPr lang="en-CA" sz="3200" b="1" dirty="0">
+              <a:ea typeface="+mn-lt"/>
+              <a:cs typeface="+mn-lt"/>
+            </a:endParaRPr>
+          </a:p>
+          <a:p>
+            <a:pPr>
+              <a:buFont typeface="Arial"/>
+              <a:buChar char="•"/>
+            </a:pPr>
+            <a:r>
+              <a:rPr lang="en-CA" sz="3200">
+                <a:ea typeface="+mn-lt"/>
+                <a:cs typeface="+mn-lt"/>
+              </a:rPr>
+              <a:t>Wanted to</a:t>
+            </a:r>
+            <a:r>
+              <a:rPr lang="en-CA" sz="3200" dirty="0">
+                <a:ea typeface="+mn-lt"/>
+                <a:cs typeface="+mn-lt"/>
+              </a:rPr>
+              <a:t> create an application with a realistic and relatable use.</a:t>
+            </a:r>
+          </a:p>
+          <a:p>
+            <a:pPr>
+              <a:buFont typeface="Arial"/>
+              <a:buChar char="•"/>
+            </a:pPr>
+            <a:r>
+              <a:rPr lang="en-CA" sz="3200">
+                <a:ea typeface="+mn-lt"/>
+                <a:cs typeface="+mn-lt"/>
+              </a:rPr>
+              <a:t>Students often struggle with organizing  their deadlines, tasks, and study schedule all in one place.</a:t>
+            </a:r>
+            <a:endParaRPr lang="en-CA">
+              <a:ea typeface="+mn-lt"/>
+              <a:cs typeface="+mn-lt"/>
+            </a:endParaRPr>
+          </a:p>
+          <a:p>
+            <a:pPr>
+              <a:buFont typeface="Arial"/>
+              <a:buChar char="•"/>
+            </a:pPr>
+            <a:r>
+              <a:rPr lang="en-CA" sz="3200">
+                <a:ea typeface="+mn-lt"/>
+                <a:cs typeface="+mn-lt"/>
+              </a:rPr>
+              <a:t>Existing apps are typically not tailored to student needs</a:t>
+            </a:r>
             <a:endParaRPr lang="en-CA"/>
+          </a:p>
+          <a:p>
+            <a:pPr>
+              <a:buFont typeface="Arial"/>
+              <a:buChar char="•"/>
+            </a:pPr>
+            <a:r>
+              <a:rPr lang="en-CA" sz="3200">
+                <a:ea typeface="+mn-lt"/>
+                <a:cs typeface="+mn-lt"/>
+              </a:rPr>
+              <a:t>Wanted to build a simple &amp; easily usable planner with the student in mind.</a:t>
+            </a:r>
+            <a:endParaRPr lang="en-CA"/>
+          </a:p>
+          <a:p>
+            <a:pPr>
+              <a:buFont typeface="Arial"/>
+              <a:buChar char="•"/>
+            </a:pPr>
+            <a:endParaRPr lang="en-CA" sz="3200" dirty="0"/>
+          </a:p>
+          <a:p>
+            <a:pPr marL="0" indent="0">
+              <a:buNone/>
+            </a:pPr>
+            <a:endParaRPr lang="en-CA" sz="3200" b="1" dirty="0"/>
           </a:p>
         </p:txBody>
       </p:sp>
@@ -3598,32 +3935,184 @@
           <a:bodyPr/>
           <a:lstStyle/>
           <a:p>
+            <a:r>
+              <a:rPr lang="en-CA" sz="6000">
+                <a:latin typeface="Amasis MT Pro Black"/>
+              </a:rPr>
+              <a:t>Objectives</a:t>
+            </a:r>
+            <a:endParaRPr lang="en-US"/>
+          </a:p>
+        </p:txBody>
+      </p:sp>
+      <p:sp>
+        <p:nvSpPr>
+          <p:cNvPr id="3" name="Content Placeholder 2">
+            <a:extLst>
+              <a:ext uri="{FF2B5EF4-FFF2-40B4-BE49-F238E27FC236}">
+                <a16:creationId xmlns:a16="http://schemas.microsoft.com/office/drawing/2014/main" id="{D9193A9F-7092-BED7-DA61-448EA903DDAE}"/>
+              </a:ext>
+            </a:extLst>
+          </p:cNvPr>
+          <p:cNvSpPr>
+            <a:spLocks noGrp="1"/>
+          </p:cNvSpPr>
+          <p:nvPr>
+            <p:ph idx="1"/>
+          </p:nvPr>
+        </p:nvSpPr>
+        <p:spPr>
+          <a:xfrm>
+            <a:off x="838200" y="1439545"/>
+            <a:ext cx="10515600" cy="4737418"/>
+          </a:xfrm>
+        </p:spPr>
+        <p:txBody>
+          <a:bodyPr vert="horz" lIns="91440" tIns="45720" rIns="91440" bIns="45720" rtlCol="0" anchor="t">
+            <a:normAutofit/>
+          </a:bodyPr>
+          <a:lstStyle/>
+          <a:p>
+            <a:pPr marL="0" indent="0">
+              <a:buNone/>
+            </a:pPr>
+            <a:r>
+              <a:rPr lang="en-CA" sz="3200" b="1" i="1">
+                <a:ea typeface="+mn-lt"/>
+                <a:cs typeface="+mn-lt"/>
+              </a:rPr>
+              <a:t>What does our app aim to achieve?</a:t>
+            </a:r>
+          </a:p>
+          <a:p>
+            <a:pPr marL="0" indent="0">
+              <a:buNone/>
+            </a:pPr>
+            <a:endParaRPr lang="en-CA" b="1" dirty="0"/>
+          </a:p>
+          <a:p>
+            <a:pPr>
+              <a:buFont typeface="Arial"/>
+              <a:buChar char="•"/>
+            </a:pPr>
+            <a:r>
+              <a:rPr lang="en-CA">
+                <a:ea typeface="+mn-lt"/>
+                <a:cs typeface="+mn-lt"/>
+              </a:rPr>
+              <a:t>Provide a centralized dashboard for organizing academic duties</a:t>
+            </a:r>
             <a:endParaRPr lang="en-CA"/>
           </a:p>
-        </p:txBody>
-      </p:sp>
-      <p:sp>
-        <p:nvSpPr>
-          <p:cNvPr id="3" name="Content Placeholder 2">
-            <a:extLst>
-              <a:ext uri="{FF2B5EF4-FFF2-40B4-BE49-F238E27FC236}">
-                <a16:creationId xmlns:a16="http://schemas.microsoft.com/office/drawing/2014/main" id="{D9193A9F-7092-BED7-DA61-448EA903DDAE}"/>
-              </a:ext>
-            </a:extLst>
-          </p:cNvPr>
-          <p:cNvSpPr>
-            <a:spLocks noGrp="1"/>
-          </p:cNvSpPr>
-          <p:nvPr>
-            <p:ph idx="1"/>
-          </p:nvPr>
-        </p:nvSpPr>
-        <p:spPr/>
-        <p:txBody>
-          <a:bodyPr/>
-          <a:lstStyle/>
-          <a:p>
+          <a:p>
+            <a:pPr>
+              <a:buFont typeface="Arial"/>
+              <a:buChar char="•"/>
+            </a:pPr>
+            <a:r>
+              <a:rPr lang="en-CA">
+                <a:ea typeface="+mn-lt"/>
+                <a:cs typeface="+mn-lt"/>
+              </a:rPr>
+              <a:t>Allow the user to add, and edit their tasks</a:t>
+            </a:r>
             <a:endParaRPr lang="en-CA"/>
+          </a:p>
+          <a:p>
+            <a:pPr>
+              <a:buFont typeface="Arial"/>
+              <a:buChar char="•"/>
+            </a:pPr>
+            <a:r>
+              <a:rPr lang="en-CA">
+                <a:ea typeface="+mn-lt"/>
+                <a:cs typeface="+mn-lt"/>
+              </a:rPr>
+              <a:t>Track task details such as:</a:t>
+            </a:r>
+            <a:endParaRPr lang="en-CA"/>
+          </a:p>
+          <a:p>
+            <a:pPr lvl="1">
+              <a:buFont typeface="Courier New"/>
+              <a:buChar char="o"/>
+            </a:pPr>
+            <a:r>
+              <a:rPr lang="en-CA">
+                <a:ea typeface="+mn-lt"/>
+                <a:cs typeface="+mn-lt"/>
+              </a:rPr>
+              <a:t>Due date</a:t>
+            </a:r>
+            <a:endParaRPr lang="en-CA"/>
+          </a:p>
+          <a:p>
+            <a:pPr lvl="1">
+              <a:buFont typeface="Courier New"/>
+              <a:buChar char="o"/>
+            </a:pPr>
+            <a:r>
+              <a:rPr lang="en-CA">
+                <a:ea typeface="+mn-lt"/>
+                <a:cs typeface="+mn-lt"/>
+              </a:rPr>
+              <a:t>Priority</a:t>
+            </a:r>
+            <a:endParaRPr lang="en-CA"/>
+          </a:p>
+          <a:p>
+            <a:pPr lvl="1">
+              <a:buFont typeface="Courier New"/>
+              <a:buChar char="o"/>
+            </a:pPr>
+            <a:r>
+              <a:rPr lang="en-CA">
+                <a:ea typeface="+mn-lt"/>
+                <a:cs typeface="+mn-lt"/>
+              </a:rPr>
+              <a:t>Notes</a:t>
+            </a:r>
+            <a:endParaRPr lang="en-CA"/>
+          </a:p>
+          <a:p>
+            <a:pPr lvl="1">
+              <a:buFont typeface="Courier New"/>
+              <a:buChar char="o"/>
+            </a:pPr>
+            <a:r>
+              <a:rPr lang="en-CA">
+                <a:ea typeface="+mn-lt"/>
+                <a:cs typeface="+mn-lt"/>
+              </a:rPr>
+              <a:t>Completion status</a:t>
+            </a:r>
+            <a:endParaRPr lang="en-CA"/>
+          </a:p>
+          <a:p>
+            <a:pPr>
+              <a:buFont typeface="Arial"/>
+              <a:buChar char="•"/>
+            </a:pPr>
+            <a:r>
+              <a:rPr lang="en-CA">
+                <a:ea typeface="+mn-lt"/>
+                <a:cs typeface="+mn-lt"/>
+              </a:rPr>
+              <a:t>Offer a clean &amp; intuitive interface for students</a:t>
+            </a:r>
+            <a:endParaRPr lang="en-CA"/>
+          </a:p>
+          <a:p>
+            <a:pPr marL="0" indent="0">
+              <a:buNone/>
+            </a:pPr>
+            <a:endParaRPr lang="en-CA" dirty="0"/>
+          </a:p>
+          <a:p>
+            <a:pPr marL="0" indent="0">
+              <a:buNone/>
+            </a:pPr>
+            <a:endParaRPr lang="en-CA" dirty="0"/>
           </a:p>
         </p:txBody>
       </p:sp>
@@ -3643,6 +4132,14 @@
 <file path=ppt/slides/slide4.xml><?xml version="1.0" encoding="utf-8"?>
 <p:sld xmlns:a="http://schemas.openxmlformats.org/drawingml/2006/main" xmlns:r="http://schemas.openxmlformats.org/officeDocument/2006/relationships" xmlns:p="http://schemas.openxmlformats.org/presentationml/2006/main">
   <p:cSld>
+    <p:bg>
+      <p:bgPr>
+        <a:solidFill>
+          <a:srgbClr val="ADD3F5"/>
+        </a:solidFill>
+        <a:effectLst/>
+      </p:bgPr>
+    </p:bg>
     <p:spTree>
       <p:nvGrpSpPr>
         <p:cNvPr id="1" name=""/>
@@ -3657,6 +4154,66 @@
           <a:chExt cx="0" cy="0"/>
         </a:xfrm>
       </p:grpSpPr>
+      <p:sp useBgFill="1">
+        <p:nvSpPr>
+          <p:cNvPr id="12" name="Rectangle 11">
+            <a:extLst>
+              <a:ext uri="{FF2B5EF4-FFF2-40B4-BE49-F238E27FC236}">
+                <a16:creationId xmlns:a16="http://schemas.microsoft.com/office/drawing/2014/main" id="{327D73B4-9F5C-4A64-A179-51B9500CB8B5}"/>
+              </a:ext>
+              <a:ext uri="{C183D7F6-B498-43B3-948B-1728B52AA6E4}">
+                <adec:decorative xmlns:adec="http://schemas.microsoft.com/office/drawing/2017/decorative" val="1"/>
+              </a:ext>
+            </a:extLst>
+          </p:cNvPr>
+          <p:cNvSpPr>
+            <a:spLocks noGrp="1" noRot="1" noChangeAspect="1" noMove="1" noResize="1" noEditPoints="1" noAdjustHandles="1" noChangeArrowheads="1" noChangeShapeType="1" noTextEdit="1"/>
+          </p:cNvSpPr>
+          <p:nvPr>
+            <p:extLst>
+              <p:ext uri="{386F3935-93C4-4BCD-93E2-E3B085C9AB24}">
+                <p16:designElem xmlns:p16="http://schemas.microsoft.com/office/powerpoint/2015/main" val="1"/>
+              </p:ext>
+            </p:extLst>
+          </p:nvPr>
+        </p:nvSpPr>
+        <p:spPr>
+          <a:xfrm>
+            <a:off x="0" y="0"/>
+            <a:ext cx="12192000" cy="6858000"/>
+          </a:xfrm>
+          <a:prstGeom prst="rect">
+            <a:avLst/>
+          </a:prstGeom>
+          <a:ln>
+            <a:noFill/>
+          </a:ln>
+        </p:spPr>
+        <p:style>
+          <a:lnRef idx="2">
+            <a:schemeClr val="accent1">
+              <a:shade val="50000"/>
+            </a:schemeClr>
+          </a:lnRef>
+          <a:fillRef idx="1">
+            <a:schemeClr val="accent1"/>
+          </a:fillRef>
+          <a:effectRef idx="0">
+            <a:schemeClr val="accent1"/>
+          </a:effectRef>
+          <a:fontRef idx="minor">
+            <a:schemeClr val="lt1"/>
+          </a:fontRef>
+        </p:style>
+        <p:txBody>
+          <a:bodyPr rtlCol="0" anchor="ctr"/>
+          <a:lstStyle/>
+          <a:p>
+            <a:pPr algn="ctr"/>
+            <a:endParaRPr lang="en-US" dirty="0"/>
+          </a:p>
+        </p:txBody>
+      </p:sp>
       <p:sp>
         <p:nvSpPr>
           <p:cNvPr id="2" name="Title 1">
@@ -3673,12 +4230,1008 @@
             <p:ph type="title"/>
           </p:nvPr>
         </p:nvSpPr>
-        <p:spPr/>
-        <p:txBody>
-          <a:bodyPr/>
+        <p:spPr>
+          <a:xfrm>
+            <a:off x="6977031" y="467271"/>
+            <a:ext cx="3876357" cy="2052522"/>
+          </a:xfrm>
+        </p:spPr>
+        <p:txBody>
+          <a:bodyPr anchor="b">
+            <a:normAutofit/>
+          </a:bodyPr>
           <a:lstStyle/>
           <a:p>
-            <a:endParaRPr lang="en-CA"/>
+            <a:r>
+              <a:rPr lang="en-CA" sz="5600">
+                <a:latin typeface="Amasis MT Pro Black"/>
+                <a:ea typeface="+mj-lt"/>
+                <a:cs typeface="+mj-lt"/>
+              </a:rPr>
+              <a:t>Tools Used</a:t>
+            </a:r>
+            <a:endParaRPr lang="en-US" sz="5600"/>
+          </a:p>
+        </p:txBody>
+      </p:sp>
+      <p:sp>
+        <p:nvSpPr>
+          <p:cNvPr id="14" name="Graphic 10">
+            <a:extLst>
+              <a:ext uri="{FF2B5EF4-FFF2-40B4-BE49-F238E27FC236}">
+                <a16:creationId xmlns:a16="http://schemas.microsoft.com/office/drawing/2014/main" id="{E3020543-B24B-4EC4-8FFC-8DD88EEA91A8}"/>
+              </a:ext>
+              <a:ext uri="{C183D7F6-B498-43B3-948B-1728B52AA6E4}">
+                <adec:decorative xmlns:adec="http://schemas.microsoft.com/office/drawing/2017/decorative" val="1"/>
+              </a:ext>
+            </a:extLst>
+          </p:cNvPr>
+          <p:cNvSpPr>
+            <a:spLocks noGrp="1" noRot="1" noChangeAspect="1" noMove="1" noResize="1" noEditPoints="1" noAdjustHandles="1" noChangeArrowheads="1" noChangeShapeType="1" noTextEdit="1"/>
+          </p:cNvSpPr>
+          <p:nvPr>
+            <p:extLst>
+              <p:ext uri="{386F3935-93C4-4BCD-93E2-E3B085C9AB24}">
+                <p16:designElem xmlns:p16="http://schemas.microsoft.com/office/powerpoint/2015/main" val="1"/>
+              </p:ext>
+            </p:extLst>
+          </p:nvPr>
+        </p:nvSpPr>
+        <p:spPr>
+          <a:xfrm>
+            <a:off x="2977883" y="2102603"/>
+            <a:ext cx="112426" cy="112426"/>
+          </a:xfrm>
+          <a:custGeom>
+            <a:avLst/>
+            <a:gdLst>
+              <a:gd name="connsiteX0" fmla="*/ 112426 w 112426"/>
+              <a:gd name="connsiteY0" fmla="*/ 56213 h 112426"/>
+              <a:gd name="connsiteX1" fmla="*/ 56213 w 112426"/>
+              <a:gd name="connsiteY1" fmla="*/ 112426 h 112426"/>
+              <a:gd name="connsiteX2" fmla="*/ 0 w 112426"/>
+              <a:gd name="connsiteY2" fmla="*/ 56213 h 112426"/>
+              <a:gd name="connsiteX3" fmla="*/ 56213 w 112426"/>
+              <a:gd name="connsiteY3" fmla="*/ 0 h 112426"/>
+              <a:gd name="connsiteX4" fmla="*/ 112426 w 112426"/>
+              <a:gd name="connsiteY4" fmla="*/ 56213 h 112426"/>
+            </a:gdLst>
+            <a:ahLst/>
+            <a:cxnLst>
+              <a:cxn ang="0">
+                <a:pos x="connsiteX0" y="connsiteY0"/>
+              </a:cxn>
+              <a:cxn ang="0">
+                <a:pos x="connsiteX1" y="connsiteY1"/>
+              </a:cxn>
+              <a:cxn ang="0">
+                <a:pos x="connsiteX2" y="connsiteY2"/>
+              </a:cxn>
+              <a:cxn ang="0">
+                <a:pos x="connsiteX3" y="connsiteY3"/>
+              </a:cxn>
+              <a:cxn ang="0">
+                <a:pos x="connsiteX4" y="connsiteY4"/>
+              </a:cxn>
+            </a:cxnLst>
+            <a:rect l="l" t="t" r="r" b="b"/>
+            <a:pathLst>
+              <a:path w="112426" h="112426">
+                <a:moveTo>
+                  <a:pt x="112426" y="56213"/>
+                </a:moveTo>
+                <a:cubicBezTo>
+                  <a:pt x="112426" y="87259"/>
+                  <a:pt x="87259" y="112426"/>
+                  <a:pt x="56213" y="112426"/>
+                </a:cubicBezTo>
+                <a:cubicBezTo>
+                  <a:pt x="25167" y="112426"/>
+                  <a:pt x="0" y="87259"/>
+                  <a:pt x="0" y="56213"/>
+                </a:cubicBezTo>
+                <a:cubicBezTo>
+                  <a:pt x="0" y="25167"/>
+                  <a:pt x="25167" y="0"/>
+                  <a:pt x="56213" y="0"/>
+                </a:cubicBezTo>
+                <a:cubicBezTo>
+                  <a:pt x="87259" y="0"/>
+                  <a:pt x="112426" y="25167"/>
+                  <a:pt x="112426" y="56213"/>
+                </a:cubicBezTo>
+                <a:close/>
+              </a:path>
+            </a:pathLst>
+          </a:custGeom>
+          <a:solidFill>
+            <a:schemeClr val="accent1"/>
+          </a:solidFill>
+          <a:ln w="516" cap="flat">
+            <a:noFill/>
+            <a:prstDash val="solid"/>
+            <a:miter/>
+          </a:ln>
+        </p:spPr>
+        <p:txBody>
+          <a:bodyPr rtlCol="0" anchor="ctr"/>
+          <a:lstStyle/>
+          <a:p>
+            <a:endParaRPr lang="en-US"/>
+          </a:p>
+        </p:txBody>
+      </p:sp>
+      <p:sp>
+        <p:nvSpPr>
+          <p:cNvPr id="16" name="Freeform: Shape 15">
+            <a:extLst>
+              <a:ext uri="{FF2B5EF4-FFF2-40B4-BE49-F238E27FC236}">
+                <a16:creationId xmlns:a16="http://schemas.microsoft.com/office/drawing/2014/main" id="{95CBC9A5-2EC2-43B3-BE31-8C21041EA4A7}"/>
+              </a:ext>
+              <a:ext uri="{C183D7F6-B498-43B3-948B-1728B52AA6E4}">
+                <adec:decorative xmlns:adec="http://schemas.microsoft.com/office/drawing/2017/decorative" val="1"/>
+              </a:ext>
+            </a:extLst>
+          </p:cNvPr>
+          <p:cNvSpPr>
+            <a:spLocks noGrp="1" noRot="1" noChangeAspect="1" noMove="1" noResize="1" noEditPoints="1" noAdjustHandles="1" noChangeArrowheads="1" noChangeShapeType="1" noTextEdit="1"/>
+          </p:cNvSpPr>
+          <p:nvPr>
+            <p:extLst>
+              <p:ext uri="{386F3935-93C4-4BCD-93E2-E3B085C9AB24}">
+                <p16:designElem xmlns:p16="http://schemas.microsoft.com/office/powerpoint/2015/main" val="1"/>
+              </p:ext>
+            </p:extLst>
+          </p:nvPr>
+        </p:nvSpPr>
+        <p:spPr>
+          <a:xfrm>
+            <a:off x="0" y="0"/>
+            <a:ext cx="3219505" cy="2553552"/>
+          </a:xfrm>
+          <a:custGeom>
+            <a:avLst/>
+            <a:gdLst>
+              <a:gd name="connsiteX0" fmla="*/ 0 w 3219505"/>
+              <a:gd name="connsiteY0" fmla="*/ 0 h 2553552"/>
+              <a:gd name="connsiteX1" fmla="*/ 3168418 w 3219505"/>
+              <a:gd name="connsiteY1" fmla="*/ 0 h 2553552"/>
+              <a:gd name="connsiteX2" fmla="*/ 3176885 w 3219505"/>
+              <a:gd name="connsiteY2" fmla="*/ 32928 h 2553552"/>
+              <a:gd name="connsiteX3" fmla="*/ 3219505 w 3219505"/>
+              <a:gd name="connsiteY3" fmla="*/ 455715 h 2553552"/>
+              <a:gd name="connsiteX4" fmla="*/ 1121668 w 3219505"/>
+              <a:gd name="connsiteY4" fmla="*/ 2553552 h 2553552"/>
+              <a:gd name="connsiteX5" fmla="*/ 121715 w 3219505"/>
+              <a:gd name="connsiteY5" fmla="*/ 2300354 h 2553552"/>
+              <a:gd name="connsiteX6" fmla="*/ 0 w 3219505"/>
+              <a:gd name="connsiteY6" fmla="*/ 2226411 h 2553552"/>
+            </a:gdLst>
+            <a:ahLst/>
+            <a:cxnLst>
+              <a:cxn ang="0">
+                <a:pos x="connsiteX0" y="connsiteY0"/>
+              </a:cxn>
+              <a:cxn ang="0">
+                <a:pos x="connsiteX1" y="connsiteY1"/>
+              </a:cxn>
+              <a:cxn ang="0">
+                <a:pos x="connsiteX2" y="connsiteY2"/>
+              </a:cxn>
+              <a:cxn ang="0">
+                <a:pos x="connsiteX3" y="connsiteY3"/>
+              </a:cxn>
+              <a:cxn ang="0">
+                <a:pos x="connsiteX4" y="connsiteY4"/>
+              </a:cxn>
+              <a:cxn ang="0">
+                <a:pos x="connsiteX5" y="connsiteY5"/>
+              </a:cxn>
+              <a:cxn ang="0">
+                <a:pos x="connsiteX6" y="connsiteY6"/>
+              </a:cxn>
+            </a:cxnLst>
+            <a:rect l="l" t="t" r="r" b="b"/>
+            <a:pathLst>
+              <a:path w="3219505" h="2553552">
+                <a:moveTo>
+                  <a:pt x="0" y="0"/>
+                </a:moveTo>
+                <a:lnTo>
+                  <a:pt x="3168418" y="0"/>
+                </a:lnTo>
+                <a:lnTo>
+                  <a:pt x="3176885" y="32928"/>
+                </a:lnTo>
+                <a:cubicBezTo>
+                  <a:pt x="3204830" y="169492"/>
+                  <a:pt x="3219505" y="310890"/>
+                  <a:pt x="3219505" y="455715"/>
+                </a:cubicBezTo>
+                <a:cubicBezTo>
+                  <a:pt x="3219505" y="1614318"/>
+                  <a:pt x="2280271" y="2553552"/>
+                  <a:pt x="1121668" y="2553552"/>
+                </a:cubicBezTo>
+                <a:cubicBezTo>
+                  <a:pt x="759605" y="2553552"/>
+                  <a:pt x="418964" y="2461830"/>
+                  <a:pt x="121715" y="2300354"/>
+                </a:cubicBezTo>
+                <a:lnTo>
+                  <a:pt x="0" y="2226411"/>
+                </a:lnTo>
+                <a:close/>
+              </a:path>
+            </a:pathLst>
+          </a:custGeom>
+          <a:gradFill flip="none" rotWithShape="1">
+            <a:gsLst>
+              <a:gs pos="0">
+                <a:schemeClr val="accent1"/>
+              </a:gs>
+              <a:gs pos="100000">
+                <a:schemeClr val="accent2"/>
+              </a:gs>
+            </a:gsLst>
+            <a:lin ang="2700000" scaled="1"/>
+            <a:tileRect/>
+          </a:gradFill>
+          <a:ln>
+            <a:noFill/>
+          </a:ln>
+        </p:spPr>
+        <p:style>
+          <a:lnRef idx="2">
+            <a:schemeClr val="accent1">
+              <a:shade val="50000"/>
+            </a:schemeClr>
+          </a:lnRef>
+          <a:fillRef idx="1">
+            <a:schemeClr val="accent1"/>
+          </a:fillRef>
+          <a:effectRef idx="0">
+            <a:schemeClr val="accent1"/>
+          </a:effectRef>
+          <a:fontRef idx="minor">
+            <a:schemeClr val="lt1"/>
+          </a:fontRef>
+        </p:style>
+        <p:txBody>
+          <a:bodyPr rtlCol="0" anchor="ctr"/>
+          <a:lstStyle/>
+          <a:p>
+            <a:pPr algn="ctr"/>
+            <a:endParaRPr lang="en-US"/>
+          </a:p>
+        </p:txBody>
+      </p:sp>
+      <p:pic>
+        <p:nvPicPr>
+          <p:cNvPr id="4" name="Picture 3" descr="A logo of a cup with smoke&#10;&#10;AI-generated content may be incorrect.">
+            <a:extLst>
+              <a:ext uri="{FF2B5EF4-FFF2-40B4-BE49-F238E27FC236}">
+                <a16:creationId xmlns:a16="http://schemas.microsoft.com/office/drawing/2014/main" id="{E2BC7C6E-A1B3-F3B6-783F-B2F19FD89098}"/>
+              </a:ext>
+            </a:extLst>
+          </p:cNvPr>
+          <p:cNvPicPr>
+            <a:picLocks noChangeAspect="1"/>
+          </p:cNvPicPr>
+          <p:nvPr/>
+        </p:nvPicPr>
+        <p:blipFill>
+          <a:blip r:embed="rId2"/>
+          <a:stretch>
+            <a:fillRect/>
+          </a:stretch>
+        </p:blipFill>
+        <p:spPr>
+          <a:xfrm>
+            <a:off x="284865" y="136525"/>
+            <a:ext cx="1935439" cy="1935439"/>
+          </a:xfrm>
+          <a:prstGeom prst="rect">
+            <a:avLst/>
+          </a:prstGeom>
+        </p:spPr>
+      </p:pic>
+      <p:sp>
+        <p:nvSpPr>
+          <p:cNvPr id="18" name="Oval 17">
+            <a:extLst>
+              <a:ext uri="{FF2B5EF4-FFF2-40B4-BE49-F238E27FC236}">
+                <a16:creationId xmlns:a16="http://schemas.microsoft.com/office/drawing/2014/main" id="{7400EEA6-B330-4DBC-A821-469627E96203}"/>
+              </a:ext>
+              <a:ext uri="{C183D7F6-B498-43B3-948B-1728B52AA6E4}">
+                <adec:decorative xmlns:adec="http://schemas.microsoft.com/office/drawing/2017/decorative" val="1"/>
+              </a:ext>
+            </a:extLst>
+          </p:cNvPr>
+          <p:cNvSpPr>
+            <a:spLocks noGrp="1" noRot="1" noChangeAspect="1" noMove="1" noResize="1" noEditPoints="1" noAdjustHandles="1" noChangeArrowheads="1" noChangeShapeType="1" noTextEdit="1"/>
+          </p:cNvSpPr>
+          <p:nvPr>
+            <p:extLst>
+              <p:ext uri="{386F3935-93C4-4BCD-93E2-E3B085C9AB24}">
+                <p16:designElem xmlns:p16="http://schemas.microsoft.com/office/powerpoint/2015/main" val="1"/>
+              </p:ext>
+            </p:extLst>
+          </p:nvPr>
+        </p:nvSpPr>
+        <p:spPr>
+          <a:xfrm>
+            <a:off x="3347433" y="118885"/>
+            <a:ext cx="2501404" cy="2501404"/>
+          </a:xfrm>
+          <a:prstGeom prst="ellipse">
+            <a:avLst/>
+          </a:prstGeom>
+          <a:gradFill flip="none" rotWithShape="1">
+            <a:gsLst>
+              <a:gs pos="0">
+                <a:schemeClr val="accent1"/>
+              </a:gs>
+              <a:gs pos="100000">
+                <a:schemeClr val="accent2"/>
+              </a:gs>
+            </a:gsLst>
+            <a:lin ang="2700000" scaled="1"/>
+            <a:tileRect/>
+          </a:gradFill>
+          <a:ln>
+            <a:noFill/>
+          </a:ln>
+        </p:spPr>
+        <p:style>
+          <a:lnRef idx="2">
+            <a:schemeClr val="accent1">
+              <a:shade val="50000"/>
+            </a:schemeClr>
+          </a:lnRef>
+          <a:fillRef idx="1">
+            <a:schemeClr val="accent1"/>
+          </a:fillRef>
+          <a:effectRef idx="0">
+            <a:schemeClr val="accent1"/>
+          </a:effectRef>
+          <a:fontRef idx="minor">
+            <a:schemeClr val="lt1"/>
+          </a:fontRef>
+        </p:style>
+        <p:txBody>
+          <a:bodyPr rtlCol="0" anchor="ctr"/>
+          <a:lstStyle/>
+          <a:p>
+            <a:pPr algn="ctr"/>
+            <a:endParaRPr lang="en-US"/>
+          </a:p>
+        </p:txBody>
+      </p:sp>
+      <p:pic>
+        <p:nvPicPr>
+          <p:cNvPr id="6" name="Picture 5" descr="A logo of a letter a and a bug&#10;&#10;AI-generated content may be incorrect.">
+            <a:extLst>
+              <a:ext uri="{FF2B5EF4-FFF2-40B4-BE49-F238E27FC236}">
+                <a16:creationId xmlns:a16="http://schemas.microsoft.com/office/drawing/2014/main" id="{8FBD62D7-7E6D-48F0-93D4-549BCA1455E8}"/>
+              </a:ext>
+            </a:extLst>
+          </p:cNvPr>
+          <p:cNvPicPr>
+            <a:picLocks noChangeAspect="1"/>
+          </p:cNvPicPr>
+          <p:nvPr/>
+        </p:nvPicPr>
+        <p:blipFill>
+          <a:blip r:embed="rId3"/>
+          <a:stretch>
+            <a:fillRect/>
+          </a:stretch>
+        </p:blipFill>
+        <p:spPr>
+          <a:xfrm>
+            <a:off x="3827324" y="598776"/>
+            <a:ext cx="1541622" cy="1541622"/>
+          </a:xfrm>
+          <a:prstGeom prst="rect">
+            <a:avLst/>
+          </a:prstGeom>
+        </p:spPr>
+      </p:pic>
+      <p:sp>
+        <p:nvSpPr>
+          <p:cNvPr id="20" name="Graphic 11">
+            <a:extLst>
+              <a:ext uri="{FF2B5EF4-FFF2-40B4-BE49-F238E27FC236}">
+                <a16:creationId xmlns:a16="http://schemas.microsoft.com/office/drawing/2014/main" id="{6CB927A4-E432-4310-9CD5-E89FF5063179}"/>
+              </a:ext>
+              <a:ext uri="{C183D7F6-B498-43B3-948B-1728B52AA6E4}">
+                <adec:decorative xmlns:adec="http://schemas.microsoft.com/office/drawing/2017/decorative" val="1"/>
+              </a:ext>
+            </a:extLst>
+          </p:cNvPr>
+          <p:cNvSpPr>
+            <a:spLocks noGrp="1" noRot="1" noChangeAspect="1" noMove="1" noResize="1" noEditPoints="1" noAdjustHandles="1" noChangeArrowheads="1" noChangeShapeType="1" noTextEdit="1"/>
+          </p:cNvSpPr>
+          <p:nvPr>
+            <p:extLst>
+              <p:ext uri="{386F3935-93C4-4BCD-93E2-E3B085C9AB24}">
+                <p16:designElem xmlns:p16="http://schemas.microsoft.com/office/powerpoint/2015/main" val="1"/>
+              </p:ext>
+            </p:extLst>
+          </p:nvPr>
+        </p:nvSpPr>
+        <p:spPr>
+          <a:xfrm>
+            <a:off x="3569269" y="2905060"/>
+            <a:ext cx="171515" cy="171515"/>
+          </a:xfrm>
+          <a:custGeom>
+            <a:avLst/>
+            <a:gdLst>
+              <a:gd name="connsiteX0" fmla="*/ 159874 w 171515"/>
+              <a:gd name="connsiteY0" fmla="*/ 74116 h 171515"/>
+              <a:gd name="connsiteX1" fmla="*/ 97399 w 171515"/>
+              <a:gd name="connsiteY1" fmla="*/ 74116 h 171515"/>
+              <a:gd name="connsiteX2" fmla="*/ 97399 w 171515"/>
+              <a:gd name="connsiteY2" fmla="*/ 11641 h 171515"/>
+              <a:gd name="connsiteX3" fmla="*/ 85758 w 171515"/>
+              <a:gd name="connsiteY3" fmla="*/ 0 h 171515"/>
+              <a:gd name="connsiteX4" fmla="*/ 74116 w 171515"/>
+              <a:gd name="connsiteY4" fmla="*/ 11641 h 171515"/>
+              <a:gd name="connsiteX5" fmla="*/ 74116 w 171515"/>
+              <a:gd name="connsiteY5" fmla="*/ 74116 h 171515"/>
+              <a:gd name="connsiteX6" fmla="*/ 11641 w 171515"/>
+              <a:gd name="connsiteY6" fmla="*/ 74116 h 171515"/>
+              <a:gd name="connsiteX7" fmla="*/ 0 w 171515"/>
+              <a:gd name="connsiteY7" fmla="*/ 85758 h 171515"/>
+              <a:gd name="connsiteX8" fmla="*/ 11641 w 171515"/>
+              <a:gd name="connsiteY8" fmla="*/ 97399 h 171515"/>
+              <a:gd name="connsiteX9" fmla="*/ 74116 w 171515"/>
+              <a:gd name="connsiteY9" fmla="*/ 97399 h 171515"/>
+              <a:gd name="connsiteX10" fmla="*/ 74116 w 171515"/>
+              <a:gd name="connsiteY10" fmla="*/ 159874 h 171515"/>
+              <a:gd name="connsiteX11" fmla="*/ 85758 w 171515"/>
+              <a:gd name="connsiteY11" fmla="*/ 171515 h 171515"/>
+              <a:gd name="connsiteX12" fmla="*/ 97399 w 171515"/>
+              <a:gd name="connsiteY12" fmla="*/ 159874 h 171515"/>
+              <a:gd name="connsiteX13" fmla="*/ 97399 w 171515"/>
+              <a:gd name="connsiteY13" fmla="*/ 97399 h 171515"/>
+              <a:gd name="connsiteX14" fmla="*/ 159874 w 171515"/>
+              <a:gd name="connsiteY14" fmla="*/ 97399 h 171515"/>
+              <a:gd name="connsiteX15" fmla="*/ 171515 w 171515"/>
+              <a:gd name="connsiteY15" fmla="*/ 85758 h 171515"/>
+              <a:gd name="connsiteX16" fmla="*/ 159874 w 171515"/>
+              <a:gd name="connsiteY16" fmla="*/ 74116 h 171515"/>
+            </a:gdLst>
+            <a:ahLst/>
+            <a:cxnLst>
+              <a:cxn ang="0">
+                <a:pos x="connsiteX0" y="connsiteY0"/>
+              </a:cxn>
+              <a:cxn ang="0">
+                <a:pos x="connsiteX1" y="connsiteY1"/>
+              </a:cxn>
+              <a:cxn ang="0">
+                <a:pos x="connsiteX2" y="connsiteY2"/>
+              </a:cxn>
+              <a:cxn ang="0">
+                <a:pos x="connsiteX3" y="connsiteY3"/>
+              </a:cxn>
+              <a:cxn ang="0">
+                <a:pos x="connsiteX4" y="connsiteY4"/>
+              </a:cxn>
+              <a:cxn ang="0">
+                <a:pos x="connsiteX5" y="connsiteY5"/>
+              </a:cxn>
+              <a:cxn ang="0">
+                <a:pos x="connsiteX6" y="connsiteY6"/>
+              </a:cxn>
+              <a:cxn ang="0">
+                <a:pos x="connsiteX7" y="connsiteY7"/>
+              </a:cxn>
+              <a:cxn ang="0">
+                <a:pos x="connsiteX8" y="connsiteY8"/>
+              </a:cxn>
+              <a:cxn ang="0">
+                <a:pos x="connsiteX9" y="connsiteY9"/>
+              </a:cxn>
+              <a:cxn ang="0">
+                <a:pos x="connsiteX10" y="connsiteY10"/>
+              </a:cxn>
+              <a:cxn ang="0">
+                <a:pos x="connsiteX11" y="connsiteY11"/>
+              </a:cxn>
+              <a:cxn ang="0">
+                <a:pos x="connsiteX12" y="connsiteY12"/>
+              </a:cxn>
+              <a:cxn ang="0">
+                <a:pos x="connsiteX13" y="connsiteY13"/>
+              </a:cxn>
+              <a:cxn ang="0">
+                <a:pos x="connsiteX14" y="connsiteY14"/>
+              </a:cxn>
+              <a:cxn ang="0">
+                <a:pos x="connsiteX15" y="connsiteY15"/>
+              </a:cxn>
+              <a:cxn ang="0">
+                <a:pos x="connsiteX16" y="connsiteY16"/>
+              </a:cxn>
+            </a:cxnLst>
+            <a:rect l="l" t="t" r="r" b="b"/>
+            <a:pathLst>
+              <a:path w="171515" h="171515">
+                <a:moveTo>
+                  <a:pt x="159874" y="74116"/>
+                </a:moveTo>
+                <a:lnTo>
+                  <a:pt x="97399" y="74116"/>
+                </a:lnTo>
+                <a:lnTo>
+                  <a:pt x="97399" y="11641"/>
+                </a:lnTo>
+                <a:cubicBezTo>
+                  <a:pt x="97399" y="5212"/>
+                  <a:pt x="92187" y="0"/>
+                  <a:pt x="85758" y="0"/>
+                </a:cubicBezTo>
+                <a:cubicBezTo>
+                  <a:pt x="79328" y="0"/>
+                  <a:pt x="74116" y="5212"/>
+                  <a:pt x="74116" y="11641"/>
+                </a:cubicBezTo>
+                <a:lnTo>
+                  <a:pt x="74116" y="74116"/>
+                </a:lnTo>
+                <a:lnTo>
+                  <a:pt x="11641" y="74116"/>
+                </a:lnTo>
+                <a:cubicBezTo>
+                  <a:pt x="5212" y="74116"/>
+                  <a:pt x="0" y="79328"/>
+                  <a:pt x="0" y="85758"/>
+                </a:cubicBezTo>
+                <a:cubicBezTo>
+                  <a:pt x="0" y="92187"/>
+                  <a:pt x="5212" y="97399"/>
+                  <a:pt x="11641" y="97399"/>
+                </a:cubicBezTo>
+                <a:lnTo>
+                  <a:pt x="74116" y="97399"/>
+                </a:lnTo>
+                <a:lnTo>
+                  <a:pt x="74116" y="159874"/>
+                </a:lnTo>
+                <a:cubicBezTo>
+                  <a:pt x="74116" y="166303"/>
+                  <a:pt x="79328" y="171515"/>
+                  <a:pt x="85758" y="171515"/>
+                </a:cubicBezTo>
+                <a:cubicBezTo>
+                  <a:pt x="92187" y="171515"/>
+                  <a:pt x="97399" y="166303"/>
+                  <a:pt x="97399" y="159874"/>
+                </a:cubicBezTo>
+                <a:lnTo>
+                  <a:pt x="97399" y="97399"/>
+                </a:lnTo>
+                <a:lnTo>
+                  <a:pt x="159874" y="97399"/>
+                </a:lnTo>
+                <a:cubicBezTo>
+                  <a:pt x="166303" y="97399"/>
+                  <a:pt x="171515" y="92187"/>
+                  <a:pt x="171515" y="85758"/>
+                </a:cubicBezTo>
+                <a:cubicBezTo>
+                  <a:pt x="171515" y="79328"/>
+                  <a:pt x="166303" y="74116"/>
+                  <a:pt x="159874" y="74116"/>
+                </a:cubicBezTo>
+                <a:close/>
+              </a:path>
+            </a:pathLst>
+          </a:custGeom>
+          <a:solidFill>
+            <a:schemeClr val="accent1"/>
+          </a:solidFill>
+          <a:ln w="776" cap="flat">
+            <a:noFill/>
+            <a:prstDash val="solid"/>
+            <a:miter/>
+          </a:ln>
+        </p:spPr>
+        <p:txBody>
+          <a:bodyPr rtlCol="0" anchor="ctr"/>
+          <a:lstStyle/>
+          <a:p>
+            <a:endParaRPr lang="en-US"/>
+          </a:p>
+        </p:txBody>
+      </p:sp>
+      <p:sp>
+        <p:nvSpPr>
+          <p:cNvPr id="22" name="Oval 21">
+            <a:extLst>
+              <a:ext uri="{FF2B5EF4-FFF2-40B4-BE49-F238E27FC236}">
+                <a16:creationId xmlns:a16="http://schemas.microsoft.com/office/drawing/2014/main" id="{5EF6BFFD-743B-47E9-AC55-ACA07581FBE4}"/>
+              </a:ext>
+              <a:ext uri="{C183D7F6-B498-43B3-948B-1728B52AA6E4}">
+                <adec:decorative xmlns:adec="http://schemas.microsoft.com/office/drawing/2017/decorative" val="1"/>
+              </a:ext>
+            </a:extLst>
+          </p:cNvPr>
+          <p:cNvSpPr>
+            <a:spLocks noGrp="1" noRot="1" noChangeAspect="1" noMove="1" noResize="1" noEditPoints="1" noAdjustHandles="1" noChangeArrowheads="1" noChangeShapeType="1" noTextEdit="1"/>
+          </p:cNvSpPr>
+          <p:nvPr>
+            <p:extLst>
+              <p:ext uri="{386F3935-93C4-4BCD-93E2-E3B085C9AB24}">
+                <p16:designElem xmlns:p16="http://schemas.microsoft.com/office/powerpoint/2015/main" val="1"/>
+              </p:ext>
+            </p:extLst>
+          </p:nvPr>
+        </p:nvSpPr>
+        <p:spPr>
+          <a:xfrm>
+            <a:off x="4205236" y="2756813"/>
+            <a:ext cx="2339616" cy="2339616"/>
+          </a:xfrm>
+          <a:prstGeom prst="ellipse">
+            <a:avLst/>
+          </a:prstGeom>
+          <a:gradFill flip="none" rotWithShape="1">
+            <a:gsLst>
+              <a:gs pos="0">
+                <a:schemeClr val="accent1"/>
+              </a:gs>
+              <a:gs pos="100000">
+                <a:schemeClr val="accent2"/>
+              </a:gs>
+            </a:gsLst>
+            <a:lin ang="2700000" scaled="1"/>
+            <a:tileRect/>
+          </a:gradFill>
+          <a:ln>
+            <a:noFill/>
+          </a:ln>
+        </p:spPr>
+        <p:style>
+          <a:lnRef idx="2">
+            <a:schemeClr val="accent1">
+              <a:shade val="50000"/>
+            </a:schemeClr>
+          </a:lnRef>
+          <a:fillRef idx="1">
+            <a:schemeClr val="accent1"/>
+          </a:fillRef>
+          <a:effectRef idx="0">
+            <a:schemeClr val="accent1"/>
+          </a:effectRef>
+          <a:fontRef idx="minor">
+            <a:schemeClr val="lt1"/>
+          </a:fontRef>
+        </p:style>
+        <p:txBody>
+          <a:bodyPr rtlCol="0" anchor="ctr"/>
+          <a:lstStyle/>
+          <a:p>
+            <a:pPr algn="ctr"/>
+            <a:endParaRPr lang="en-US"/>
+          </a:p>
+        </p:txBody>
+      </p:sp>
+      <p:sp>
+        <p:nvSpPr>
+          <p:cNvPr id="24" name="Freeform: Shape 23">
+            <a:extLst>
+              <a:ext uri="{FF2B5EF4-FFF2-40B4-BE49-F238E27FC236}">
+                <a16:creationId xmlns:a16="http://schemas.microsoft.com/office/drawing/2014/main" id="{8D3BEFDA-0C8B-4C24-AF49-B7E58C98DB64}"/>
+              </a:ext>
+              <a:ext uri="{C183D7F6-B498-43B3-948B-1728B52AA6E4}">
+                <adec:decorative xmlns:adec="http://schemas.microsoft.com/office/drawing/2017/decorative" val="1"/>
+              </a:ext>
+            </a:extLst>
+          </p:cNvPr>
+          <p:cNvSpPr>
+            <a:spLocks noGrp="1" noRot="1" noChangeAspect="1" noMove="1" noResize="1" noEditPoints="1" noAdjustHandles="1" noChangeArrowheads="1" noChangeShapeType="1" noTextEdit="1"/>
+          </p:cNvSpPr>
+          <p:nvPr>
+            <p:extLst>
+              <p:ext uri="{386F3935-93C4-4BCD-93E2-E3B085C9AB24}">
+                <p16:designElem xmlns:p16="http://schemas.microsoft.com/office/powerpoint/2015/main" val="1"/>
+              </p:ext>
+            </p:extLst>
+          </p:nvPr>
+        </p:nvSpPr>
+        <p:spPr>
+          <a:xfrm>
+            <a:off x="0" y="2756811"/>
+            <a:ext cx="4507268" cy="4101189"/>
+          </a:xfrm>
+          <a:custGeom>
+            <a:avLst/>
+            <a:gdLst>
+              <a:gd name="connsiteX0" fmla="*/ 1188901 w 4507268"/>
+              <a:gd name="connsiteY0" fmla="*/ 0 h 4101189"/>
+              <a:gd name="connsiteX1" fmla="*/ 4507268 w 4507268"/>
+              <a:gd name="connsiteY1" fmla="*/ 3318367 h 4101189"/>
+              <a:gd name="connsiteX2" fmla="*/ 4439851 w 4507268"/>
+              <a:gd name="connsiteY2" fmla="*/ 3987135 h 4101189"/>
+              <a:gd name="connsiteX3" fmla="*/ 4410525 w 4507268"/>
+              <a:gd name="connsiteY3" fmla="*/ 4101189 h 4101189"/>
+              <a:gd name="connsiteX4" fmla="*/ 0 w 4507268"/>
+              <a:gd name="connsiteY4" fmla="*/ 4101189 h 4101189"/>
+              <a:gd name="connsiteX5" fmla="*/ 0 w 4507268"/>
+              <a:gd name="connsiteY5" fmla="*/ 221283 h 4101189"/>
+              <a:gd name="connsiteX6" fmla="*/ 47936 w 4507268"/>
+              <a:gd name="connsiteY6" fmla="*/ 201358 h 4101189"/>
+              <a:gd name="connsiteX7" fmla="*/ 1188901 w 4507268"/>
+              <a:gd name="connsiteY7" fmla="*/ 0 h 4101189"/>
+            </a:gdLst>
+            <a:ahLst/>
+            <a:cxnLst>
+              <a:cxn ang="0">
+                <a:pos x="connsiteX0" y="connsiteY0"/>
+              </a:cxn>
+              <a:cxn ang="0">
+                <a:pos x="connsiteX1" y="connsiteY1"/>
+              </a:cxn>
+              <a:cxn ang="0">
+                <a:pos x="connsiteX2" y="connsiteY2"/>
+              </a:cxn>
+              <a:cxn ang="0">
+                <a:pos x="connsiteX3" y="connsiteY3"/>
+              </a:cxn>
+              <a:cxn ang="0">
+                <a:pos x="connsiteX4" y="connsiteY4"/>
+              </a:cxn>
+              <a:cxn ang="0">
+                <a:pos x="connsiteX5" y="connsiteY5"/>
+              </a:cxn>
+              <a:cxn ang="0">
+                <a:pos x="connsiteX6" y="connsiteY6"/>
+              </a:cxn>
+              <a:cxn ang="0">
+                <a:pos x="connsiteX7" y="connsiteY7"/>
+              </a:cxn>
+            </a:cxnLst>
+            <a:rect l="l" t="t" r="r" b="b"/>
+            <a:pathLst>
+              <a:path w="4507268" h="4101189">
+                <a:moveTo>
+                  <a:pt x="1188901" y="0"/>
+                </a:moveTo>
+                <a:cubicBezTo>
+                  <a:pt x="3021585" y="0"/>
+                  <a:pt x="4507268" y="1485684"/>
+                  <a:pt x="4507268" y="3318367"/>
+                </a:cubicBezTo>
+                <a:cubicBezTo>
+                  <a:pt x="4507268" y="3547453"/>
+                  <a:pt x="4484055" y="3771117"/>
+                  <a:pt x="4439851" y="3987135"/>
+                </a:cubicBezTo>
+                <a:lnTo>
+                  <a:pt x="4410525" y="4101189"/>
+                </a:lnTo>
+                <a:lnTo>
+                  <a:pt x="0" y="4101189"/>
+                </a:lnTo>
+                <a:lnTo>
+                  <a:pt x="0" y="221283"/>
+                </a:lnTo>
+                <a:lnTo>
+                  <a:pt x="47936" y="201358"/>
+                </a:lnTo>
+                <a:cubicBezTo>
+                  <a:pt x="403707" y="71093"/>
+                  <a:pt x="788002" y="0"/>
+                  <a:pt x="1188901" y="0"/>
+                </a:cubicBezTo>
+                <a:close/>
+              </a:path>
+            </a:pathLst>
+          </a:custGeom>
+          <a:gradFill flip="none" rotWithShape="1">
+            <a:gsLst>
+              <a:gs pos="0">
+                <a:schemeClr val="accent1"/>
+              </a:gs>
+              <a:gs pos="100000">
+                <a:schemeClr val="accent2"/>
+              </a:gs>
+            </a:gsLst>
+            <a:lin ang="2700000" scaled="1"/>
+            <a:tileRect/>
+          </a:gradFill>
+          <a:ln>
+            <a:noFill/>
+          </a:ln>
+        </p:spPr>
+        <p:style>
+          <a:lnRef idx="2">
+            <a:schemeClr val="accent1">
+              <a:shade val="50000"/>
+            </a:schemeClr>
+          </a:lnRef>
+          <a:fillRef idx="1">
+            <a:schemeClr val="accent1"/>
+          </a:fillRef>
+          <a:effectRef idx="0">
+            <a:schemeClr val="accent1"/>
+          </a:effectRef>
+          <a:fontRef idx="minor">
+            <a:schemeClr val="lt1"/>
+          </a:fontRef>
+        </p:style>
+        <p:txBody>
+          <a:bodyPr rtlCol="0" anchor="ctr"/>
+          <a:lstStyle/>
+          <a:p>
+            <a:pPr algn="ctr"/>
+            <a:endParaRPr lang="en-US"/>
+          </a:p>
+        </p:txBody>
+      </p:sp>
+      <p:sp>
+        <p:nvSpPr>
+          <p:cNvPr id="26" name="Graphic 12">
+            <a:extLst>
+              <a:ext uri="{FF2B5EF4-FFF2-40B4-BE49-F238E27FC236}">
+                <a16:creationId xmlns:a16="http://schemas.microsoft.com/office/drawing/2014/main" id="{1453BF6C-B012-48B7-B4E8-6D7AC7C27D02}"/>
+              </a:ext>
+              <a:ext uri="{C183D7F6-B498-43B3-948B-1728B52AA6E4}">
+                <adec:decorative xmlns:adec="http://schemas.microsoft.com/office/drawing/2017/decorative" val="1"/>
+              </a:ext>
+            </a:extLst>
+          </p:cNvPr>
+          <p:cNvSpPr>
+            <a:spLocks noGrp="1" noRot="1" noChangeAspect="1" noMove="1" noResize="1" noEditPoints="1" noAdjustHandles="1" noChangeArrowheads="1" noChangeShapeType="1" noTextEdit="1"/>
+          </p:cNvSpPr>
+          <p:nvPr>
+            <p:extLst>
+              <p:ext uri="{386F3935-93C4-4BCD-93E2-E3B085C9AB24}">
+                <p16:designElem xmlns:p16="http://schemas.microsoft.com/office/powerpoint/2015/main" val="1"/>
+              </p:ext>
+            </p:extLst>
+          </p:nvPr>
+        </p:nvSpPr>
+        <p:spPr>
+          <a:xfrm>
+            <a:off x="4908065" y="5544766"/>
+            <a:ext cx="157545" cy="157545"/>
+          </a:xfrm>
+          <a:custGeom>
+            <a:avLst/>
+            <a:gdLst>
+              <a:gd name="connsiteX0" fmla="*/ 78773 w 157545"/>
+              <a:gd name="connsiteY0" fmla="*/ 23283 h 157545"/>
+              <a:gd name="connsiteX1" fmla="*/ 134262 w 157545"/>
+              <a:gd name="connsiteY1" fmla="*/ 78773 h 157545"/>
+              <a:gd name="connsiteX2" fmla="*/ 78773 w 157545"/>
+              <a:gd name="connsiteY2" fmla="*/ 134262 h 157545"/>
+              <a:gd name="connsiteX3" fmla="*/ 23283 w 157545"/>
+              <a:gd name="connsiteY3" fmla="*/ 78773 h 157545"/>
+              <a:gd name="connsiteX4" fmla="*/ 78773 w 157545"/>
+              <a:gd name="connsiteY4" fmla="*/ 23283 h 157545"/>
+              <a:gd name="connsiteX5" fmla="*/ 78773 w 157545"/>
+              <a:gd name="connsiteY5" fmla="*/ 0 h 157545"/>
+              <a:gd name="connsiteX6" fmla="*/ 0 w 157545"/>
+              <a:gd name="connsiteY6" fmla="*/ 78773 h 157545"/>
+              <a:gd name="connsiteX7" fmla="*/ 78773 w 157545"/>
+              <a:gd name="connsiteY7" fmla="*/ 157545 h 157545"/>
+              <a:gd name="connsiteX8" fmla="*/ 157545 w 157545"/>
+              <a:gd name="connsiteY8" fmla="*/ 78773 h 157545"/>
+              <a:gd name="connsiteX9" fmla="*/ 78773 w 157545"/>
+              <a:gd name="connsiteY9" fmla="*/ 0 h 157545"/>
+            </a:gdLst>
+            <a:ahLst/>
+            <a:cxnLst>
+              <a:cxn ang="0">
+                <a:pos x="connsiteX0" y="connsiteY0"/>
+              </a:cxn>
+              <a:cxn ang="0">
+                <a:pos x="connsiteX1" y="connsiteY1"/>
+              </a:cxn>
+              <a:cxn ang="0">
+                <a:pos x="connsiteX2" y="connsiteY2"/>
+              </a:cxn>
+              <a:cxn ang="0">
+                <a:pos x="connsiteX3" y="connsiteY3"/>
+              </a:cxn>
+              <a:cxn ang="0">
+                <a:pos x="connsiteX4" y="connsiteY4"/>
+              </a:cxn>
+              <a:cxn ang="0">
+                <a:pos x="connsiteX5" y="connsiteY5"/>
+              </a:cxn>
+              <a:cxn ang="0">
+                <a:pos x="connsiteX6" y="connsiteY6"/>
+              </a:cxn>
+              <a:cxn ang="0">
+                <a:pos x="connsiteX7" y="connsiteY7"/>
+              </a:cxn>
+              <a:cxn ang="0">
+                <a:pos x="connsiteX8" y="connsiteY8"/>
+              </a:cxn>
+              <a:cxn ang="0">
+                <a:pos x="connsiteX9" y="connsiteY9"/>
+              </a:cxn>
+            </a:cxnLst>
+            <a:rect l="l" t="t" r="r" b="b"/>
+            <a:pathLst>
+              <a:path w="157545" h="157545">
+                <a:moveTo>
+                  <a:pt x="78773" y="23283"/>
+                </a:moveTo>
+                <a:cubicBezTo>
+                  <a:pt x="109419" y="23283"/>
+                  <a:pt x="134262" y="48126"/>
+                  <a:pt x="134262" y="78773"/>
+                </a:cubicBezTo>
+                <a:cubicBezTo>
+                  <a:pt x="134262" y="109419"/>
+                  <a:pt x="109419" y="134262"/>
+                  <a:pt x="78773" y="134262"/>
+                </a:cubicBezTo>
+                <a:cubicBezTo>
+                  <a:pt x="48126" y="134262"/>
+                  <a:pt x="23283" y="109419"/>
+                  <a:pt x="23283" y="78773"/>
+                </a:cubicBezTo>
+                <a:cubicBezTo>
+                  <a:pt x="23312" y="48139"/>
+                  <a:pt x="48139" y="23312"/>
+                  <a:pt x="78773" y="23283"/>
+                </a:cubicBezTo>
+                <a:moveTo>
+                  <a:pt x="78773" y="0"/>
+                </a:moveTo>
+                <a:cubicBezTo>
+                  <a:pt x="35268" y="0"/>
+                  <a:pt x="0" y="35268"/>
+                  <a:pt x="0" y="78773"/>
+                </a:cubicBezTo>
+                <a:cubicBezTo>
+                  <a:pt x="0" y="122277"/>
+                  <a:pt x="35268" y="157545"/>
+                  <a:pt x="78773" y="157545"/>
+                </a:cubicBezTo>
+                <a:cubicBezTo>
+                  <a:pt x="122277" y="157545"/>
+                  <a:pt x="157545" y="122277"/>
+                  <a:pt x="157545" y="78773"/>
+                </a:cubicBezTo>
+                <a:cubicBezTo>
+                  <a:pt x="157545" y="35268"/>
+                  <a:pt x="122277" y="0"/>
+                  <a:pt x="78773" y="0"/>
+                </a:cubicBezTo>
+                <a:close/>
+              </a:path>
+            </a:pathLst>
+          </a:custGeom>
+          <a:solidFill>
+            <a:schemeClr val="accent1"/>
+          </a:solidFill>
+          <a:ln w="751" cap="flat">
+            <a:noFill/>
+            <a:prstDash val="solid"/>
+            <a:miter/>
+          </a:ln>
+        </p:spPr>
+        <p:txBody>
+          <a:bodyPr rtlCol="0" anchor="ctr"/>
+          <a:lstStyle/>
+          <a:p>
+            <a:endParaRPr lang="en-US">
+              <a:solidFill>
+                <a:schemeClr val="tx1">
+                  <a:alpha val="60000"/>
+                </a:schemeClr>
+              </a:solidFill>
+            </a:endParaRPr>
           </a:p>
         </p:txBody>
       </p:sp>
@@ -3698,15 +5251,323 @@
             <p:ph idx="1"/>
           </p:nvPr>
         </p:nvSpPr>
-        <p:spPr/>
-        <p:txBody>
-          <a:bodyPr/>
+        <p:spPr>
+          <a:xfrm>
+            <a:off x="6981331" y="2990818"/>
+            <a:ext cx="4288619" cy="2913872"/>
+          </a:xfrm>
+        </p:spPr>
+        <p:txBody>
+          <a:bodyPr vert="horz" lIns="91440" tIns="45720" rIns="91440" bIns="45720" rtlCol="0" anchor="t">
+            <a:normAutofit/>
+          </a:bodyPr>
           <a:lstStyle/>
           <a:p>
-            <a:endParaRPr lang="en-CA"/>
-          </a:p>
-        </p:txBody>
-      </p:sp>
+            <a:r>
+              <a:rPr lang="en-CA" sz="1700" b="1">
+                <a:solidFill>
+                  <a:schemeClr val="tx1">
+                    <a:alpha val="80000"/>
+                  </a:schemeClr>
+                </a:solidFill>
+                <a:ea typeface="+mn-lt"/>
+                <a:cs typeface="+mn-lt"/>
+              </a:rPr>
+              <a:t>Android Studio</a:t>
+            </a:r>
+            <a:r>
+              <a:rPr lang="en-CA" sz="1700">
+                <a:solidFill>
+                  <a:schemeClr val="tx1">
+                    <a:alpha val="80000"/>
+                  </a:schemeClr>
+                </a:solidFill>
+                <a:ea typeface="+mn-lt"/>
+                <a:cs typeface="+mn-lt"/>
+              </a:rPr>
+              <a:t> - Primary IDE</a:t>
+            </a:r>
+          </a:p>
+          <a:p>
+            <a:pPr lvl="1">
+              <a:buFont typeface="Courier New" panose="020B0604020202020204" pitchFamily="34" charset="0"/>
+              <a:buChar char="o"/>
+            </a:pPr>
+            <a:r>
+              <a:rPr lang="en-CA" sz="1700" b="1">
+                <a:solidFill>
+                  <a:schemeClr val="tx1">
+                    <a:alpha val="80000"/>
+                  </a:schemeClr>
+                </a:solidFill>
+                <a:ea typeface="+mn-lt"/>
+                <a:cs typeface="+mn-lt"/>
+              </a:rPr>
+              <a:t>Room Database</a:t>
+            </a:r>
+          </a:p>
+          <a:p>
+            <a:r>
+              <a:rPr lang="en-CA" sz="1700" b="1">
+                <a:solidFill>
+                  <a:schemeClr val="tx1">
+                    <a:alpha val="80000"/>
+                  </a:schemeClr>
+                </a:solidFill>
+                <a:ea typeface="+mn-lt"/>
+                <a:cs typeface="+mn-lt"/>
+              </a:rPr>
+              <a:t>Java</a:t>
+            </a:r>
+            <a:r>
+              <a:rPr lang="en-CA" sz="1700">
+                <a:solidFill>
+                  <a:schemeClr val="tx1">
+                    <a:alpha val="80000"/>
+                  </a:schemeClr>
+                </a:solidFill>
+                <a:ea typeface="+mn-lt"/>
+                <a:cs typeface="+mn-lt"/>
+              </a:rPr>
+              <a:t> - App logic</a:t>
+            </a:r>
+          </a:p>
+          <a:p>
+            <a:r>
+              <a:rPr lang="en-CA" sz="1700" b="1">
+                <a:solidFill>
+                  <a:schemeClr val="tx1">
+                    <a:alpha val="80000"/>
+                  </a:schemeClr>
+                </a:solidFill>
+                <a:ea typeface="+mn-lt"/>
+                <a:cs typeface="+mn-lt"/>
+              </a:rPr>
+              <a:t>XML</a:t>
+            </a:r>
+            <a:r>
+              <a:rPr lang="en-CA" sz="1700">
+                <a:solidFill>
+                  <a:schemeClr val="tx1">
+                    <a:alpha val="80000"/>
+                  </a:schemeClr>
+                </a:solidFill>
+                <a:ea typeface="+mn-lt"/>
+                <a:cs typeface="+mn-lt"/>
+              </a:rPr>
+              <a:t> - UI design</a:t>
+            </a:r>
+          </a:p>
+          <a:p>
+            <a:r>
+              <a:rPr lang="en-CA" sz="1700" b="1">
+                <a:solidFill>
+                  <a:schemeClr val="tx1">
+                    <a:alpha val="80000"/>
+                  </a:schemeClr>
+                </a:solidFill>
+                <a:ea typeface="+mn-lt"/>
+                <a:cs typeface="+mn-lt"/>
+              </a:rPr>
+              <a:t>GitHub</a:t>
+            </a:r>
+            <a:r>
+              <a:rPr lang="en-CA" sz="1700">
+                <a:solidFill>
+                  <a:schemeClr val="tx1">
+                    <a:alpha val="80000"/>
+                  </a:schemeClr>
+                </a:solidFill>
+                <a:ea typeface="+mn-lt"/>
+                <a:cs typeface="+mn-lt"/>
+              </a:rPr>
+              <a:t> - Version control</a:t>
+            </a:r>
+          </a:p>
+          <a:p>
+            <a:pPr lvl="1">
+              <a:buFont typeface="Courier New" panose="020B0604020202020204" pitchFamily="34" charset="0"/>
+              <a:buChar char="o"/>
+            </a:pPr>
+            <a:r>
+              <a:rPr lang="en-CA" sz="1700" dirty="0">
+                <a:solidFill>
+                  <a:schemeClr val="tx1">
+                    <a:alpha val="80000"/>
+                  </a:schemeClr>
+                </a:solidFill>
+                <a:ea typeface="+mn-lt"/>
+                <a:cs typeface="+mn-lt"/>
+              </a:rPr>
+              <a:t>github.com/</a:t>
+            </a:r>
+            <a:r>
+              <a:rPr lang="en-CA" sz="1700" dirty="0" err="1">
+                <a:solidFill>
+                  <a:schemeClr val="tx1">
+                    <a:alpha val="80000"/>
+                  </a:schemeClr>
+                </a:solidFill>
+                <a:ea typeface="+mn-lt"/>
+                <a:cs typeface="+mn-lt"/>
+              </a:rPr>
+              <a:t>MadisonGosselin</a:t>
+            </a:r>
+            <a:r>
+              <a:rPr lang="en-CA" sz="1700" dirty="0">
+                <a:solidFill>
+                  <a:schemeClr val="tx1">
+                    <a:alpha val="80000"/>
+                  </a:schemeClr>
+                </a:solidFill>
+                <a:ea typeface="+mn-lt"/>
+                <a:cs typeface="+mn-lt"/>
+              </a:rPr>
+              <a:t>/COMP4200_StudentPlanner</a:t>
+            </a:r>
+          </a:p>
+          <a:p>
+            <a:pPr marL="457200" lvl="1" indent="0">
+              <a:buNone/>
+            </a:pPr>
+            <a:endParaRPr lang="en-CA" sz="1700">
+              <a:solidFill>
+                <a:schemeClr val="tx1">
+                  <a:alpha val="80000"/>
+                </a:schemeClr>
+              </a:solidFill>
+            </a:endParaRPr>
+          </a:p>
+        </p:txBody>
+      </p:sp>
+      <p:pic>
+        <p:nvPicPr>
+          <p:cNvPr id="7" name="Graphic 6">
+            <a:extLst>
+              <a:ext uri="{FF2B5EF4-FFF2-40B4-BE49-F238E27FC236}">
+                <a16:creationId xmlns:a16="http://schemas.microsoft.com/office/drawing/2014/main" id="{82E112FD-7393-BE09-16F9-F818476DB52E}"/>
+              </a:ext>
+            </a:extLst>
+          </p:cNvPr>
+          <p:cNvPicPr>
+            <a:picLocks noChangeAspect="1"/>
+          </p:cNvPicPr>
+          <p:nvPr/>
+        </p:nvPicPr>
+        <p:blipFill>
+          <a:blip>
+            <a:extLst>
+              <a:ext uri="{96DAC541-7B7A-43D3-8B79-37D633B846F1}">
+                <asvg:svgBlip xmlns:asvg="http://schemas.microsoft.com/office/drawing/2016/SVG/main" r:embed="rId4"/>
+              </a:ext>
+            </a:extLst>
+          </a:blip>
+          <a:stretch>
+            <a:fillRect/>
+          </a:stretch>
+        </p:blipFill>
+        <p:spPr>
+          <a:xfrm>
+            <a:off x="284865" y="3659227"/>
+            <a:ext cx="2961232" cy="2961232"/>
+          </a:xfrm>
+          <a:prstGeom prst="rect">
+            <a:avLst/>
+          </a:prstGeom>
+        </p:spPr>
+      </p:pic>
+      <p:pic>
+        <p:nvPicPr>
+          <p:cNvPr id="5" name="Picture 4" descr="A white and orange file with text&#10;&#10;AI-generated content may be incorrect.">
+            <a:extLst>
+              <a:ext uri="{FF2B5EF4-FFF2-40B4-BE49-F238E27FC236}">
+                <a16:creationId xmlns:a16="http://schemas.microsoft.com/office/drawing/2014/main" id="{4BB2B0CF-CF24-FB96-03A8-8830F41175B7}"/>
+              </a:ext>
+            </a:extLst>
+          </p:cNvPr>
+          <p:cNvPicPr>
+            <a:picLocks noChangeAspect="1"/>
+          </p:cNvPicPr>
+          <p:nvPr/>
+        </p:nvPicPr>
+        <p:blipFill>
+          <a:blip r:embed="rId5"/>
+          <a:stretch>
+            <a:fillRect/>
+          </a:stretch>
+        </p:blipFill>
+        <p:spPr>
+          <a:xfrm>
+            <a:off x="4654088" y="3205665"/>
+            <a:ext cx="1441912" cy="1441912"/>
+          </a:xfrm>
+          <a:prstGeom prst="rect">
+            <a:avLst/>
+          </a:prstGeom>
+        </p:spPr>
+      </p:pic>
+      <p:cxnSp>
+        <p:nvCxnSpPr>
+          <p:cNvPr id="28" name="Straight Connector 27">
+            <a:extLst>
+              <a:ext uri="{FF2B5EF4-FFF2-40B4-BE49-F238E27FC236}">
+                <a16:creationId xmlns:a16="http://schemas.microsoft.com/office/drawing/2014/main" id="{C49DA8F6-BCC1-4447-B54C-57856834B94B}"/>
+              </a:ext>
+              <a:ext uri="{C183D7F6-B498-43B3-948B-1728B52AA6E4}">
+                <adec:decorative xmlns:adec="http://schemas.microsoft.com/office/drawing/2017/decorative" val="1"/>
+              </a:ext>
+            </a:extLst>
+          </p:cNvPr>
+          <p:cNvCxnSpPr>
+            <a:cxnSpLocks noGrp="1" noRot="1" noChangeAspect="1" noMove="1" noResize="1" noEditPoints="1" noAdjustHandles="1" noChangeArrowheads="1" noChangeShapeType="1"/>
+          </p:cNvCxnSpPr>
+          <p:nvPr>
+            <p:extLst>
+              <p:ext uri="{386F3935-93C4-4BCD-93E2-E3B085C9AB24}">
+                <p16:designElem xmlns:p16="http://schemas.microsoft.com/office/powerpoint/2015/main" val="1"/>
+              </p:ext>
+            </p:extLst>
+          </p:nvPr>
+        </p:nvCxnSpPr>
+        <p:spPr>
+          <a:xfrm>
+            <a:off x="11586162" y="3610394"/>
+            <a:ext cx="0" cy="3238728"/>
+          </a:xfrm>
+          <a:prstGeom prst="line">
+            <a:avLst/>
+          </a:prstGeom>
+          <a:ln w="25400" cap="sq">
+            <a:gradFill flip="none" rotWithShape="1">
+              <a:gsLst>
+                <a:gs pos="0">
+                  <a:schemeClr val="accent1"/>
+                </a:gs>
+                <a:gs pos="100000">
+                  <a:schemeClr val="accent2"/>
+                </a:gs>
+              </a:gsLst>
+              <a:lin ang="16200000" scaled="1"/>
+              <a:tileRect/>
+            </a:gradFill>
+            <a:bevel/>
+          </a:ln>
+        </p:spPr>
+        <p:style>
+          <a:lnRef idx="1">
+            <a:schemeClr val="accent1"/>
+          </a:lnRef>
+          <a:fillRef idx="0">
+            <a:schemeClr val="accent1"/>
+          </a:fillRef>
+          <a:effectRef idx="0">
+            <a:schemeClr val="accent1"/>
+          </a:effectRef>
+          <a:fontRef idx="minor">
+            <a:schemeClr val="tx1"/>
+          </a:fontRef>
+        </p:style>
+      </p:cxnSp>
     </p:spTree>
     <p:extLst>
       <p:ext uri="{BB962C8B-B14F-4D97-AF65-F5344CB8AC3E}">
@@ -3723,6 +5584,14 @@
 <file path=ppt/slides/slide5.xml><?xml version="1.0" encoding="utf-8"?>
 <p:sld xmlns:a="http://schemas.openxmlformats.org/drawingml/2006/main" xmlns:r="http://schemas.openxmlformats.org/officeDocument/2006/relationships" xmlns:p="http://schemas.openxmlformats.org/presentationml/2006/main">
   <p:cSld>
+    <p:bg>
+      <p:bgPr>
+        <a:solidFill>
+          <a:srgbClr val="ADD3F5"/>
+        </a:solidFill>
+        <a:effectLst/>
+      </p:bgPr>
+    </p:bg>
     <p:spTree>
       <p:nvGrpSpPr>
         <p:cNvPr id="1" name=""/>
@@ -3737,12 +5606,72 @@
           <a:chExt cx="0" cy="0"/>
         </a:xfrm>
       </p:grpSpPr>
+      <p:sp useBgFill="1">
+        <p:nvSpPr>
+          <p:cNvPr id="11" name="Rectangle 10">
+            <a:extLst>
+              <a:ext uri="{FF2B5EF4-FFF2-40B4-BE49-F238E27FC236}">
+                <a16:creationId xmlns:a16="http://schemas.microsoft.com/office/drawing/2014/main" id="{8D1AA55E-40D5-461B-A5A8-4AE8AAB71B08}"/>
+              </a:ext>
+              <a:ext uri="{C183D7F6-B498-43B3-948B-1728B52AA6E4}">
+                <adec:decorative xmlns:adec="http://schemas.microsoft.com/office/drawing/2017/decorative" val="1"/>
+              </a:ext>
+            </a:extLst>
+          </p:cNvPr>
+          <p:cNvSpPr>
+            <a:spLocks noGrp="1" noRot="1" noChangeAspect="1" noMove="1" noResize="1" noEditPoints="1" noAdjustHandles="1" noChangeArrowheads="1" noChangeShapeType="1" noTextEdit="1"/>
+          </p:cNvSpPr>
+          <p:nvPr>
+            <p:extLst>
+              <p:ext uri="{386F3935-93C4-4BCD-93E2-E3B085C9AB24}">
+                <p16:designElem xmlns:p16="http://schemas.microsoft.com/office/powerpoint/2015/main" val="1"/>
+              </p:ext>
+            </p:extLst>
+          </p:nvPr>
+        </p:nvSpPr>
+        <p:spPr>
+          <a:xfrm>
+            <a:off x="0" y="0"/>
+            <a:ext cx="12192000" cy="6858000"/>
+          </a:xfrm>
+          <a:prstGeom prst="rect">
+            <a:avLst/>
+          </a:prstGeom>
+          <a:ln>
+            <a:noFill/>
+          </a:ln>
+        </p:spPr>
+        <p:style>
+          <a:lnRef idx="2">
+            <a:schemeClr val="accent1">
+              <a:shade val="50000"/>
+            </a:schemeClr>
+          </a:lnRef>
+          <a:fillRef idx="1">
+            <a:schemeClr val="accent1"/>
+          </a:fillRef>
+          <a:effectRef idx="0">
+            <a:schemeClr val="accent1"/>
+          </a:effectRef>
+          <a:fontRef idx="minor">
+            <a:schemeClr val="lt1"/>
+          </a:fontRef>
+        </p:style>
+        <p:txBody>
+          <a:bodyPr rtlCol="0" anchor="ctr"/>
+          <a:lstStyle/>
+          <a:p>
+            <a:pPr algn="ctr"/>
+            <a:endParaRPr lang="en-US" dirty="0"/>
+          </a:p>
+        </p:txBody>
+      </p:sp>
       <p:sp>
         <p:nvSpPr>
           <p:cNvPr id="2" name="Title 1">
             <a:extLst>
               <a:ext uri="{FF2B5EF4-FFF2-40B4-BE49-F238E27FC236}">
-                <a16:creationId xmlns:a16="http://schemas.microsoft.com/office/drawing/2014/main" id="{025A8DC1-8CC8-535C-071E-2330EAC963F5}"/>
+                <a16:creationId xmlns:a16="http://schemas.microsoft.com/office/drawing/2014/main" id="{B3F7628F-324E-B510-4E59-B8064C09F154}"/>
               </a:ext>
             </a:extLst>
           </p:cNvPr>
@@ -3753,21 +5682,96 @@
             <p:ph type="title"/>
           </p:nvPr>
         </p:nvSpPr>
-        <p:spPr/>
-        <p:txBody>
-          <a:bodyPr/>
+        <p:spPr>
+          <a:xfrm>
+            <a:off x="838200" y="1336390"/>
+            <a:ext cx="6155988" cy="1182927"/>
+          </a:xfrm>
+        </p:spPr>
+        <p:txBody>
+          <a:bodyPr anchor="b">
+            <a:normAutofit/>
+          </a:bodyPr>
           <a:lstStyle/>
           <a:p>
-            <a:endParaRPr lang="en-CA"/>
-          </a:p>
-        </p:txBody>
-      </p:sp>
-      <p:sp>
-        <p:nvSpPr>
-          <p:cNvPr id="3" name="Content Placeholder 2">
-            <a:extLst>
-              <a:ext uri="{FF2B5EF4-FFF2-40B4-BE49-F238E27FC236}">
-                <a16:creationId xmlns:a16="http://schemas.microsoft.com/office/drawing/2014/main" id="{9E4B47A3-6299-C905-E291-6A2321716C0C}"/>
+            <a:r>
+              <a:rPr lang="en-CA" sz="5600">
+                <a:latin typeface="Amasis MT Pro Black"/>
+              </a:rPr>
+              <a:t>Login Screen</a:t>
+            </a:r>
+            <a:endParaRPr lang="en-US" sz="5600"/>
+          </a:p>
+        </p:txBody>
+      </p:sp>
+      <p:cxnSp>
+        <p:nvCxnSpPr>
+          <p:cNvPr id="13" name="Straight Connector 12">
+            <a:extLst>
+              <a:ext uri="{FF2B5EF4-FFF2-40B4-BE49-F238E27FC236}">
+                <a16:creationId xmlns:a16="http://schemas.microsoft.com/office/drawing/2014/main" id="{7EB498BD-8089-4626-91EA-4978EBEF535E}"/>
+              </a:ext>
+              <a:ext uri="{C183D7F6-B498-43B3-948B-1728B52AA6E4}">
+                <adec:decorative xmlns:adec="http://schemas.microsoft.com/office/drawing/2017/decorative" val="1"/>
+              </a:ext>
+            </a:extLst>
+          </p:cNvPr>
+          <p:cNvCxnSpPr>
+            <a:cxnSpLocks noGrp="1" noRot="1" noChangeAspect="1" noMove="1" noResize="1" noEditPoints="1" noAdjustHandles="1" noChangeArrowheads="1" noChangeShapeType="1"/>
+          </p:cNvCxnSpPr>
+          <p:nvPr>
+            <p:extLst>
+              <p:ext uri="{386F3935-93C4-4BCD-93E2-E3B085C9AB24}">
+                <p16:designElem xmlns:p16="http://schemas.microsoft.com/office/powerpoint/2015/main" val="1"/>
+              </p:ext>
+            </p:extLst>
+          </p:nvPr>
+        </p:nvCxnSpPr>
+        <p:spPr>
+          <a:xfrm>
+            <a:off x="0" y="806470"/>
+            <a:ext cx="7903723" cy="0"/>
+          </a:xfrm>
+          <a:prstGeom prst="line">
+            <a:avLst/>
+          </a:prstGeom>
+          <a:ln w="25400" cap="sq">
+            <a:gradFill flip="none" rotWithShape="1">
+              <a:gsLst>
+                <a:gs pos="0">
+                  <a:schemeClr val="accent1"/>
+                </a:gs>
+                <a:gs pos="100000">
+                  <a:schemeClr val="accent2"/>
+                </a:gs>
+              </a:gsLst>
+              <a:lin ang="10800000" scaled="0"/>
+              <a:tileRect/>
+            </a:gradFill>
+            <a:bevel/>
+          </a:ln>
+        </p:spPr>
+        <p:style>
+          <a:lnRef idx="1">
+            <a:schemeClr val="accent1"/>
+          </a:lnRef>
+          <a:fillRef idx="0">
+            <a:schemeClr val="accent1"/>
+          </a:fillRef>
+          <a:effectRef idx="0">
+            <a:schemeClr val="accent1"/>
+          </a:effectRef>
+          <a:fontRef idx="minor">
+            <a:schemeClr val="tx1"/>
+          </a:fontRef>
+        </p:style>
+      </p:cxnSp>
+      <p:sp>
+        <p:nvSpPr>
+          <p:cNvPr id="8" name="Content Placeholder 7">
+            <a:extLst>
+              <a:ext uri="{FF2B5EF4-FFF2-40B4-BE49-F238E27FC236}">
+                <a16:creationId xmlns:a16="http://schemas.microsoft.com/office/drawing/2014/main" id="{B91F81C7-33A8-6D18-24C6-B9EDEDF15132}"/>
               </a:ext>
             </a:extLst>
           </p:cNvPr>
@@ -3778,19 +5782,491 @@
             <p:ph idx="1"/>
           </p:nvPr>
         </p:nvSpPr>
-        <p:spPr/>
-        <p:txBody>
-          <a:bodyPr/>
+        <p:spPr>
+          <a:xfrm>
+            <a:off x="803776" y="2829330"/>
+            <a:ext cx="6190412" cy="3344459"/>
+          </a:xfrm>
+        </p:spPr>
+        <p:txBody>
+          <a:bodyPr anchor="t">
+            <a:normAutofit/>
+          </a:bodyPr>
           <a:lstStyle/>
           <a:p>
-            <a:endParaRPr lang="en-CA"/>
+            <a:pPr marL="0" indent="0">
+              <a:buNone/>
+            </a:pPr>
+            <a:r>
+              <a:rPr lang="en-US" b="1">
+                <a:solidFill>
+                  <a:schemeClr val="tx1">
+                    <a:alpha val="80000"/>
+                  </a:schemeClr>
+                </a:solidFill>
+                <a:ea typeface="+mn-lt"/>
+                <a:cs typeface="+mn-lt"/>
+              </a:rPr>
+              <a:t>Features:</a:t>
+            </a:r>
+            <a:endParaRPr lang="en-US">
+              <a:solidFill>
+                <a:schemeClr val="tx1">
+                  <a:alpha val="80000"/>
+                </a:schemeClr>
+              </a:solidFill>
+            </a:endParaRPr>
+          </a:p>
+          <a:p>
+            <a:r>
+              <a:rPr lang="en-US" sz="2200">
+                <a:solidFill>
+                  <a:schemeClr val="tx1">
+                    <a:alpha val="80000"/>
+                  </a:schemeClr>
+                </a:solidFill>
+                <a:ea typeface="+mn-lt"/>
+                <a:cs typeface="+mn-lt"/>
+              </a:rPr>
+              <a:t>App logo &amp; name</a:t>
+            </a:r>
+            <a:endParaRPr lang="en-US" sz="2200">
+              <a:solidFill>
+                <a:schemeClr val="tx1">
+                  <a:alpha val="80000"/>
+                </a:schemeClr>
+              </a:solidFill>
+            </a:endParaRPr>
+          </a:p>
+          <a:p>
+            <a:r>
+              <a:rPr lang="en-US" sz="2200">
+                <a:solidFill>
+                  <a:schemeClr val="tx1">
+                    <a:alpha val="80000"/>
+                  </a:schemeClr>
+                </a:solidFill>
+                <a:ea typeface="+mn-lt"/>
+                <a:cs typeface="+mn-lt"/>
+              </a:rPr>
+              <a:t>Login information fields</a:t>
+            </a:r>
+            <a:endParaRPr lang="en-US" sz="2200">
+              <a:solidFill>
+                <a:schemeClr val="tx1">
+                  <a:alpha val="80000"/>
+                </a:schemeClr>
+              </a:solidFill>
+            </a:endParaRPr>
+          </a:p>
+          <a:p>
+            <a:r>
+              <a:rPr lang="en-US" sz="2200">
+                <a:solidFill>
+                  <a:schemeClr val="tx1">
+                    <a:alpha val="80000"/>
+                  </a:schemeClr>
+                </a:solidFill>
+                <a:ea typeface="+mn-lt"/>
+                <a:cs typeface="+mn-lt"/>
+              </a:rPr>
+              <a:t>Pre-filled field hints</a:t>
+            </a:r>
+            <a:endParaRPr lang="en-US" sz="2200">
+              <a:solidFill>
+                <a:schemeClr val="tx1">
+                  <a:alpha val="80000"/>
+                </a:schemeClr>
+              </a:solidFill>
+            </a:endParaRPr>
+          </a:p>
+          <a:p>
+            <a:r>
+              <a:rPr lang="en-US" sz="2200">
+                <a:solidFill>
+                  <a:schemeClr val="tx1">
+                    <a:alpha val="80000"/>
+                  </a:schemeClr>
+                </a:solidFill>
+                <a:ea typeface="+mn-lt"/>
+                <a:cs typeface="+mn-lt"/>
+              </a:rPr>
+              <a:t>Login button → navigates to Home Screen</a:t>
+            </a:r>
+            <a:endParaRPr lang="en-US" sz="2200">
+              <a:solidFill>
+                <a:schemeClr val="tx1">
+                  <a:alpha val="80000"/>
+                </a:schemeClr>
+              </a:solidFill>
+            </a:endParaRPr>
+          </a:p>
+          <a:p>
+            <a:pPr marL="0" indent="0">
+              <a:buNone/>
+            </a:pPr>
+            <a:endParaRPr lang="en-US" sz="2000" dirty="0">
+              <a:solidFill>
+                <a:srgbClr val="000000">
+                  <a:alpha val="80000"/>
+                </a:srgbClr>
+              </a:solidFill>
+            </a:endParaRPr>
+          </a:p>
+        </p:txBody>
+      </p:sp>
+      <p:pic>
+        <p:nvPicPr>
+          <p:cNvPr id="4" name="Content Placeholder 3" descr="A screenshot of a login form&#10;&#10;AI-generated content may be incorrect.">
+            <a:extLst>
+              <a:ext uri="{FF2B5EF4-FFF2-40B4-BE49-F238E27FC236}">
+                <a16:creationId xmlns:a16="http://schemas.microsoft.com/office/drawing/2014/main" id="{12E847B7-6D0C-1224-F1D9-034BB4502599}"/>
+              </a:ext>
+            </a:extLst>
+          </p:cNvPr>
+          <p:cNvPicPr>
+            <a:picLocks noChangeAspect="1"/>
+          </p:cNvPicPr>
+          <p:nvPr/>
+        </p:nvPicPr>
+        <p:blipFill>
+          <a:blip r:embed="rId2"/>
+          <a:stretch>
+            <a:fillRect/>
+          </a:stretch>
+        </p:blipFill>
+        <p:spPr>
+          <a:xfrm>
+            <a:off x="8329562" y="858870"/>
+            <a:ext cx="2471466" cy="5538434"/>
+          </a:xfrm>
+          <a:prstGeom prst="rect">
+            <a:avLst/>
+          </a:prstGeom>
+        </p:spPr>
+      </p:pic>
+      <p:sp>
+        <p:nvSpPr>
+          <p:cNvPr id="15" name="Graphic 11">
+            <a:extLst>
+              <a:ext uri="{FF2B5EF4-FFF2-40B4-BE49-F238E27FC236}">
+                <a16:creationId xmlns:a16="http://schemas.microsoft.com/office/drawing/2014/main" id="{6CB927A4-E432-4310-9CD5-E89FF5063179}"/>
+              </a:ext>
+              <a:ext uri="{C183D7F6-B498-43B3-948B-1728B52AA6E4}">
+                <adec:decorative xmlns:adec="http://schemas.microsoft.com/office/drawing/2017/decorative" val="1"/>
+              </a:ext>
+            </a:extLst>
+          </p:cNvPr>
+          <p:cNvSpPr>
+            <a:spLocks noGrp="1" noRot="1" noChangeAspect="1" noMove="1" noResize="1" noEditPoints="1" noAdjustHandles="1" noChangeArrowheads="1" noChangeShapeType="1" noTextEdit="1"/>
+          </p:cNvSpPr>
+          <p:nvPr>
+            <p:extLst>
+              <p:ext uri="{386F3935-93C4-4BCD-93E2-E3B085C9AB24}">
+                <p16:designElem xmlns:p16="http://schemas.microsoft.com/office/powerpoint/2015/main" val="1"/>
+              </p:ext>
+            </p:extLst>
+          </p:nvPr>
+        </p:nvSpPr>
+        <p:spPr>
+          <a:xfrm>
+            <a:off x="10924552" y="1899284"/>
+            <a:ext cx="139039" cy="139039"/>
+          </a:xfrm>
+          <a:custGeom>
+            <a:avLst/>
+            <a:gdLst>
+              <a:gd name="connsiteX0" fmla="*/ 129602 w 139039"/>
+              <a:gd name="connsiteY0" fmla="*/ 60082 h 139039"/>
+              <a:gd name="connsiteX1" fmla="*/ 78957 w 139039"/>
+              <a:gd name="connsiteY1" fmla="*/ 60082 h 139039"/>
+              <a:gd name="connsiteX2" fmla="*/ 78957 w 139039"/>
+              <a:gd name="connsiteY2" fmla="*/ 9437 h 139039"/>
+              <a:gd name="connsiteX3" fmla="*/ 69520 w 139039"/>
+              <a:gd name="connsiteY3" fmla="*/ 0 h 139039"/>
+              <a:gd name="connsiteX4" fmla="*/ 60082 w 139039"/>
+              <a:gd name="connsiteY4" fmla="*/ 9437 h 139039"/>
+              <a:gd name="connsiteX5" fmla="*/ 60082 w 139039"/>
+              <a:gd name="connsiteY5" fmla="*/ 60082 h 139039"/>
+              <a:gd name="connsiteX6" fmla="*/ 9437 w 139039"/>
+              <a:gd name="connsiteY6" fmla="*/ 60082 h 139039"/>
+              <a:gd name="connsiteX7" fmla="*/ 0 w 139039"/>
+              <a:gd name="connsiteY7" fmla="*/ 69520 h 139039"/>
+              <a:gd name="connsiteX8" fmla="*/ 9437 w 139039"/>
+              <a:gd name="connsiteY8" fmla="*/ 78957 h 139039"/>
+              <a:gd name="connsiteX9" fmla="*/ 60082 w 139039"/>
+              <a:gd name="connsiteY9" fmla="*/ 78957 h 139039"/>
+              <a:gd name="connsiteX10" fmla="*/ 60082 w 139039"/>
+              <a:gd name="connsiteY10" fmla="*/ 129602 h 139039"/>
+              <a:gd name="connsiteX11" fmla="*/ 69520 w 139039"/>
+              <a:gd name="connsiteY11" fmla="*/ 139039 h 139039"/>
+              <a:gd name="connsiteX12" fmla="*/ 78957 w 139039"/>
+              <a:gd name="connsiteY12" fmla="*/ 129602 h 139039"/>
+              <a:gd name="connsiteX13" fmla="*/ 78957 w 139039"/>
+              <a:gd name="connsiteY13" fmla="*/ 78957 h 139039"/>
+              <a:gd name="connsiteX14" fmla="*/ 129602 w 139039"/>
+              <a:gd name="connsiteY14" fmla="*/ 78957 h 139039"/>
+              <a:gd name="connsiteX15" fmla="*/ 139039 w 139039"/>
+              <a:gd name="connsiteY15" fmla="*/ 69520 h 139039"/>
+              <a:gd name="connsiteX16" fmla="*/ 129602 w 139039"/>
+              <a:gd name="connsiteY16" fmla="*/ 60082 h 139039"/>
+            </a:gdLst>
+            <a:ahLst/>
+            <a:cxnLst>
+              <a:cxn ang="0">
+                <a:pos x="connsiteX0" y="connsiteY0"/>
+              </a:cxn>
+              <a:cxn ang="0">
+                <a:pos x="connsiteX1" y="connsiteY1"/>
+              </a:cxn>
+              <a:cxn ang="0">
+                <a:pos x="connsiteX2" y="connsiteY2"/>
+              </a:cxn>
+              <a:cxn ang="0">
+                <a:pos x="connsiteX3" y="connsiteY3"/>
+              </a:cxn>
+              <a:cxn ang="0">
+                <a:pos x="connsiteX4" y="connsiteY4"/>
+              </a:cxn>
+              <a:cxn ang="0">
+                <a:pos x="connsiteX5" y="connsiteY5"/>
+              </a:cxn>
+              <a:cxn ang="0">
+                <a:pos x="connsiteX6" y="connsiteY6"/>
+              </a:cxn>
+              <a:cxn ang="0">
+                <a:pos x="connsiteX7" y="connsiteY7"/>
+              </a:cxn>
+              <a:cxn ang="0">
+                <a:pos x="connsiteX8" y="connsiteY8"/>
+              </a:cxn>
+              <a:cxn ang="0">
+                <a:pos x="connsiteX9" y="connsiteY9"/>
+              </a:cxn>
+              <a:cxn ang="0">
+                <a:pos x="connsiteX10" y="connsiteY10"/>
+              </a:cxn>
+              <a:cxn ang="0">
+                <a:pos x="connsiteX11" y="connsiteY11"/>
+              </a:cxn>
+              <a:cxn ang="0">
+                <a:pos x="connsiteX12" y="connsiteY12"/>
+              </a:cxn>
+              <a:cxn ang="0">
+                <a:pos x="connsiteX13" y="connsiteY13"/>
+              </a:cxn>
+              <a:cxn ang="0">
+                <a:pos x="connsiteX14" y="connsiteY14"/>
+              </a:cxn>
+              <a:cxn ang="0">
+                <a:pos x="connsiteX15" y="connsiteY15"/>
+              </a:cxn>
+              <a:cxn ang="0">
+                <a:pos x="connsiteX16" y="connsiteY16"/>
+              </a:cxn>
+            </a:cxnLst>
+            <a:rect l="l" t="t" r="r" b="b"/>
+            <a:pathLst>
+              <a:path w="139039" h="139039">
+                <a:moveTo>
+                  <a:pt x="129602" y="60082"/>
+                </a:moveTo>
+                <a:lnTo>
+                  <a:pt x="78957" y="60082"/>
+                </a:lnTo>
+                <a:lnTo>
+                  <a:pt x="78957" y="9437"/>
+                </a:lnTo>
+                <a:cubicBezTo>
+                  <a:pt x="78957" y="4225"/>
+                  <a:pt x="74731" y="0"/>
+                  <a:pt x="69520" y="0"/>
+                </a:cubicBezTo>
+                <a:cubicBezTo>
+                  <a:pt x="64308" y="0"/>
+                  <a:pt x="60082" y="4225"/>
+                  <a:pt x="60082" y="9437"/>
+                </a:cubicBezTo>
+                <a:lnTo>
+                  <a:pt x="60082" y="60082"/>
+                </a:lnTo>
+                <a:lnTo>
+                  <a:pt x="9437" y="60082"/>
+                </a:lnTo>
+                <a:cubicBezTo>
+                  <a:pt x="4225" y="60082"/>
+                  <a:pt x="0" y="64308"/>
+                  <a:pt x="0" y="69520"/>
+                </a:cubicBezTo>
+                <a:cubicBezTo>
+                  <a:pt x="0" y="74731"/>
+                  <a:pt x="4225" y="78957"/>
+                  <a:pt x="9437" y="78957"/>
+                </a:cubicBezTo>
+                <a:lnTo>
+                  <a:pt x="60082" y="78957"/>
+                </a:lnTo>
+                <a:lnTo>
+                  <a:pt x="60082" y="129602"/>
+                </a:lnTo>
+                <a:cubicBezTo>
+                  <a:pt x="60082" y="134814"/>
+                  <a:pt x="64308" y="139039"/>
+                  <a:pt x="69520" y="139039"/>
+                </a:cubicBezTo>
+                <a:cubicBezTo>
+                  <a:pt x="74731" y="139039"/>
+                  <a:pt x="78957" y="134814"/>
+                  <a:pt x="78957" y="129602"/>
+                </a:cubicBezTo>
+                <a:lnTo>
+                  <a:pt x="78957" y="78957"/>
+                </a:lnTo>
+                <a:lnTo>
+                  <a:pt x="129602" y="78957"/>
+                </a:lnTo>
+                <a:cubicBezTo>
+                  <a:pt x="134814" y="78957"/>
+                  <a:pt x="139039" y="74731"/>
+                  <a:pt x="139039" y="69520"/>
+                </a:cubicBezTo>
+                <a:cubicBezTo>
+                  <a:pt x="139039" y="64308"/>
+                  <a:pt x="134814" y="60082"/>
+                  <a:pt x="129602" y="60082"/>
+                </a:cubicBezTo>
+                <a:close/>
+              </a:path>
+            </a:pathLst>
+          </a:custGeom>
+          <a:solidFill>
+            <a:schemeClr val="accent1"/>
+          </a:solidFill>
+          <a:ln w="603" cap="flat">
+            <a:noFill/>
+            <a:prstDash val="solid"/>
+            <a:miter/>
+          </a:ln>
+        </p:spPr>
+        <p:txBody>
+          <a:bodyPr rtlCol="0" anchor="ctr"/>
+          <a:lstStyle/>
+          <a:p>
+            <a:endParaRPr lang="en-US"/>
+          </a:p>
+        </p:txBody>
+      </p:sp>
+      <p:sp>
+        <p:nvSpPr>
+          <p:cNvPr id="17" name="Graphic 10">
+            <a:extLst>
+              <a:ext uri="{FF2B5EF4-FFF2-40B4-BE49-F238E27FC236}">
+                <a16:creationId xmlns:a16="http://schemas.microsoft.com/office/drawing/2014/main" id="{E3020543-B24B-4EC4-8FFC-8DD88EEA91A8}"/>
+              </a:ext>
+              <a:ext uri="{C183D7F6-B498-43B3-948B-1728B52AA6E4}">
+                <adec:decorative xmlns:adec="http://schemas.microsoft.com/office/drawing/2017/decorative" val="1"/>
+              </a:ext>
+            </a:extLst>
+          </p:cNvPr>
+          <p:cNvSpPr>
+            <a:spLocks noGrp="1" noRot="1" noChangeAspect="1" noMove="1" noResize="1" noEditPoints="1" noAdjustHandles="1" noChangeArrowheads="1" noChangeShapeType="1" noTextEdit="1"/>
+          </p:cNvSpPr>
+          <p:nvPr>
+            <p:extLst>
+              <p:ext uri="{386F3935-93C4-4BCD-93E2-E3B085C9AB24}">
+                <p16:designElem xmlns:p16="http://schemas.microsoft.com/office/powerpoint/2015/main" val="1"/>
+              </p:ext>
+            </p:extLst>
+          </p:nvPr>
+        </p:nvSpPr>
+        <p:spPr>
+          <a:xfrm>
+            <a:off x="11236862" y="2189928"/>
+            <a:ext cx="91138" cy="91138"/>
+          </a:xfrm>
+          <a:custGeom>
+            <a:avLst/>
+            <a:gdLst>
+              <a:gd name="connsiteX0" fmla="*/ 91138 w 91138"/>
+              <a:gd name="connsiteY0" fmla="*/ 45569 h 91138"/>
+              <a:gd name="connsiteX1" fmla="*/ 45569 w 91138"/>
+              <a:gd name="connsiteY1" fmla="*/ 91138 h 91138"/>
+              <a:gd name="connsiteX2" fmla="*/ 0 w 91138"/>
+              <a:gd name="connsiteY2" fmla="*/ 45569 h 91138"/>
+              <a:gd name="connsiteX3" fmla="*/ 45569 w 91138"/>
+              <a:gd name="connsiteY3" fmla="*/ 0 h 91138"/>
+              <a:gd name="connsiteX4" fmla="*/ 91138 w 91138"/>
+              <a:gd name="connsiteY4" fmla="*/ 45569 h 91138"/>
+            </a:gdLst>
+            <a:ahLst/>
+            <a:cxnLst>
+              <a:cxn ang="0">
+                <a:pos x="connsiteX0" y="connsiteY0"/>
+              </a:cxn>
+              <a:cxn ang="0">
+                <a:pos x="connsiteX1" y="connsiteY1"/>
+              </a:cxn>
+              <a:cxn ang="0">
+                <a:pos x="connsiteX2" y="connsiteY2"/>
+              </a:cxn>
+              <a:cxn ang="0">
+                <a:pos x="connsiteX3" y="connsiteY3"/>
+              </a:cxn>
+              <a:cxn ang="0">
+                <a:pos x="connsiteX4" y="connsiteY4"/>
+              </a:cxn>
+            </a:cxnLst>
+            <a:rect l="l" t="t" r="r" b="b"/>
+            <a:pathLst>
+              <a:path w="91138" h="91138">
+                <a:moveTo>
+                  <a:pt x="91138" y="45569"/>
+                </a:moveTo>
+                <a:cubicBezTo>
+                  <a:pt x="91138" y="70736"/>
+                  <a:pt x="70736" y="91138"/>
+                  <a:pt x="45569" y="91138"/>
+                </a:cubicBezTo>
+                <a:cubicBezTo>
+                  <a:pt x="20402" y="91138"/>
+                  <a:pt x="0" y="70736"/>
+                  <a:pt x="0" y="45569"/>
+                </a:cubicBezTo>
+                <a:cubicBezTo>
+                  <a:pt x="0" y="20402"/>
+                  <a:pt x="20402" y="0"/>
+                  <a:pt x="45569" y="0"/>
+                </a:cubicBezTo>
+                <a:cubicBezTo>
+                  <a:pt x="70736" y="0"/>
+                  <a:pt x="91138" y="20402"/>
+                  <a:pt x="91138" y="45569"/>
+                </a:cubicBezTo>
+                <a:close/>
+              </a:path>
+            </a:pathLst>
+          </a:custGeom>
+          <a:solidFill>
+            <a:schemeClr val="accent1"/>
+          </a:solidFill>
+          <a:ln w="422" cap="flat">
+            <a:noFill/>
+            <a:prstDash val="solid"/>
+            <a:miter/>
+          </a:ln>
+        </p:spPr>
+        <p:txBody>
+          <a:bodyPr rtlCol="0" anchor="ctr"/>
+          <a:lstStyle/>
+          <a:p>
+            <a:endParaRPr lang="en-US"/>
           </a:p>
         </p:txBody>
       </p:sp>
     </p:spTree>
     <p:extLst>
       <p:ext uri="{BB962C8B-B14F-4D97-AF65-F5344CB8AC3E}">
-        <p14:creationId xmlns:p14="http://schemas.microsoft.com/office/powerpoint/2010/main" val="3936936907"/>
+        <p14:creationId xmlns:p14="http://schemas.microsoft.com/office/powerpoint/2010/main" val="2236321285"/>
       </p:ext>
     </p:extLst>
   </p:cSld>
@@ -3801,6 +6277,2175 @@
 </file>
 
 <file path=ppt/slides/slide6.xml><?xml version="1.0" encoding="utf-8"?>
+<p:sld xmlns:a="http://schemas.openxmlformats.org/drawingml/2006/main" xmlns:r="http://schemas.openxmlformats.org/officeDocument/2006/relationships" xmlns:p="http://schemas.openxmlformats.org/presentationml/2006/main">
+  <p:cSld>
+    <p:bg>
+      <p:bgPr>
+        <a:solidFill>
+          <a:srgbClr val="ADD3F5"/>
+        </a:solidFill>
+        <a:effectLst/>
+      </p:bgPr>
+    </p:bg>
+    <p:spTree>
+      <p:nvGrpSpPr>
+        <p:cNvPr id="1" name=""/>
+        <p:cNvGrpSpPr/>
+        <p:nvPr/>
+      </p:nvGrpSpPr>
+      <p:grpSpPr>
+        <a:xfrm>
+          <a:off x="0" y="0"/>
+          <a:ext cx="0" cy="0"/>
+          <a:chOff x="0" y="0"/>
+          <a:chExt cx="0" cy="0"/>
+        </a:xfrm>
+      </p:grpSpPr>
+      <p:sp useBgFill="1">
+        <p:nvSpPr>
+          <p:cNvPr id="11" name="Rectangle 10">
+            <a:extLst>
+              <a:ext uri="{FF2B5EF4-FFF2-40B4-BE49-F238E27FC236}">
+                <a16:creationId xmlns:a16="http://schemas.microsoft.com/office/drawing/2014/main" id="{8D1AA55E-40D5-461B-A5A8-4AE8AAB71B08}"/>
+              </a:ext>
+              <a:ext uri="{C183D7F6-B498-43B3-948B-1728B52AA6E4}">
+                <adec:decorative xmlns:adec="http://schemas.microsoft.com/office/drawing/2017/decorative" val="1"/>
+              </a:ext>
+            </a:extLst>
+          </p:cNvPr>
+          <p:cNvSpPr>
+            <a:spLocks noGrp="1" noRot="1" noChangeAspect="1" noMove="1" noResize="1" noEditPoints="1" noAdjustHandles="1" noChangeArrowheads="1" noChangeShapeType="1" noTextEdit="1"/>
+          </p:cNvSpPr>
+          <p:nvPr>
+            <p:extLst>
+              <p:ext uri="{386F3935-93C4-4BCD-93E2-E3B085C9AB24}">
+                <p16:designElem xmlns:p16="http://schemas.microsoft.com/office/powerpoint/2015/main" val="1"/>
+              </p:ext>
+            </p:extLst>
+          </p:nvPr>
+        </p:nvSpPr>
+        <p:spPr>
+          <a:xfrm>
+            <a:off x="0" y="0"/>
+            <a:ext cx="12192000" cy="6858000"/>
+          </a:xfrm>
+          <a:prstGeom prst="rect">
+            <a:avLst/>
+          </a:prstGeom>
+          <a:ln>
+            <a:noFill/>
+          </a:ln>
+        </p:spPr>
+        <p:style>
+          <a:lnRef idx="2">
+            <a:schemeClr val="accent1">
+              <a:shade val="50000"/>
+            </a:schemeClr>
+          </a:lnRef>
+          <a:fillRef idx="1">
+            <a:schemeClr val="accent1"/>
+          </a:fillRef>
+          <a:effectRef idx="0">
+            <a:schemeClr val="accent1"/>
+          </a:effectRef>
+          <a:fontRef idx="minor">
+            <a:schemeClr val="lt1"/>
+          </a:fontRef>
+        </p:style>
+        <p:txBody>
+          <a:bodyPr rtlCol="0" anchor="ctr"/>
+          <a:lstStyle/>
+          <a:p>
+            <a:pPr algn="ctr"/>
+            <a:endParaRPr lang="en-US" dirty="0"/>
+          </a:p>
+        </p:txBody>
+      </p:sp>
+      <p:sp>
+        <p:nvSpPr>
+          <p:cNvPr id="2" name="Title 1">
+            <a:extLst>
+              <a:ext uri="{FF2B5EF4-FFF2-40B4-BE49-F238E27FC236}">
+                <a16:creationId xmlns:a16="http://schemas.microsoft.com/office/drawing/2014/main" id="{6E5C3D1A-55E4-EEB0-BF54-05275CB3B9B6}"/>
+              </a:ext>
+            </a:extLst>
+          </p:cNvPr>
+          <p:cNvSpPr>
+            <a:spLocks noGrp="1"/>
+          </p:cNvSpPr>
+          <p:nvPr>
+            <p:ph type="title"/>
+          </p:nvPr>
+        </p:nvSpPr>
+        <p:spPr>
+          <a:xfrm>
+            <a:off x="838200" y="1336390"/>
+            <a:ext cx="6155988" cy="1182927"/>
+          </a:xfrm>
+        </p:spPr>
+        <p:txBody>
+          <a:bodyPr anchor="b">
+            <a:normAutofit/>
+          </a:bodyPr>
+          <a:lstStyle/>
+          <a:p>
+            <a:r>
+              <a:rPr lang="en-CA" sz="5600">
+                <a:latin typeface="Amasis MT Pro Black"/>
+              </a:rPr>
+              <a:t>Home Page</a:t>
+            </a:r>
+            <a:endParaRPr lang="en-US" sz="5600"/>
+          </a:p>
+        </p:txBody>
+      </p:sp>
+      <p:cxnSp>
+        <p:nvCxnSpPr>
+          <p:cNvPr id="13" name="Straight Connector 12">
+            <a:extLst>
+              <a:ext uri="{FF2B5EF4-FFF2-40B4-BE49-F238E27FC236}">
+                <a16:creationId xmlns:a16="http://schemas.microsoft.com/office/drawing/2014/main" id="{7EB498BD-8089-4626-91EA-4978EBEF535E}"/>
+              </a:ext>
+              <a:ext uri="{C183D7F6-B498-43B3-948B-1728B52AA6E4}">
+                <adec:decorative xmlns:adec="http://schemas.microsoft.com/office/drawing/2017/decorative" val="1"/>
+              </a:ext>
+            </a:extLst>
+          </p:cNvPr>
+          <p:cNvCxnSpPr>
+            <a:cxnSpLocks noGrp="1" noRot="1" noChangeAspect="1" noMove="1" noResize="1" noEditPoints="1" noAdjustHandles="1" noChangeArrowheads="1" noChangeShapeType="1"/>
+          </p:cNvCxnSpPr>
+          <p:nvPr>
+            <p:extLst>
+              <p:ext uri="{386F3935-93C4-4BCD-93E2-E3B085C9AB24}">
+                <p16:designElem xmlns:p16="http://schemas.microsoft.com/office/powerpoint/2015/main" val="1"/>
+              </p:ext>
+            </p:extLst>
+          </p:nvPr>
+        </p:nvCxnSpPr>
+        <p:spPr>
+          <a:xfrm>
+            <a:off x="0" y="806470"/>
+            <a:ext cx="7903723" cy="0"/>
+          </a:xfrm>
+          <a:prstGeom prst="line">
+            <a:avLst/>
+          </a:prstGeom>
+          <a:ln w="25400" cap="sq">
+            <a:gradFill flip="none" rotWithShape="1">
+              <a:gsLst>
+                <a:gs pos="0">
+                  <a:schemeClr val="accent1"/>
+                </a:gs>
+                <a:gs pos="100000">
+                  <a:schemeClr val="accent2"/>
+                </a:gs>
+              </a:gsLst>
+              <a:lin ang="10800000" scaled="0"/>
+              <a:tileRect/>
+            </a:gradFill>
+            <a:bevel/>
+          </a:ln>
+        </p:spPr>
+        <p:style>
+          <a:lnRef idx="1">
+            <a:schemeClr val="accent1"/>
+          </a:lnRef>
+          <a:fillRef idx="0">
+            <a:schemeClr val="accent1"/>
+          </a:fillRef>
+          <a:effectRef idx="0">
+            <a:schemeClr val="accent1"/>
+          </a:effectRef>
+          <a:fontRef idx="minor">
+            <a:schemeClr val="tx1"/>
+          </a:fontRef>
+        </p:style>
+      </p:cxnSp>
+      <p:sp>
+        <p:nvSpPr>
+          <p:cNvPr id="8" name="Content Placeholder 7">
+            <a:extLst>
+              <a:ext uri="{FF2B5EF4-FFF2-40B4-BE49-F238E27FC236}">
+                <a16:creationId xmlns:a16="http://schemas.microsoft.com/office/drawing/2014/main" id="{35AA606B-7118-E6C6-D203-34ED445A14FA}"/>
+              </a:ext>
+            </a:extLst>
+          </p:cNvPr>
+          <p:cNvSpPr>
+            <a:spLocks noGrp="1"/>
+          </p:cNvSpPr>
+          <p:nvPr>
+            <p:ph idx="1"/>
+          </p:nvPr>
+        </p:nvSpPr>
+        <p:spPr>
+          <a:xfrm>
+            <a:off x="803776" y="2829330"/>
+            <a:ext cx="6190412" cy="3344459"/>
+          </a:xfrm>
+        </p:spPr>
+        <p:txBody>
+          <a:bodyPr anchor="t">
+            <a:normAutofit/>
+          </a:bodyPr>
+          <a:lstStyle/>
+          <a:p>
+            <a:pPr marL="0" indent="0">
+              <a:buNone/>
+            </a:pPr>
+            <a:r>
+              <a:rPr lang="en-US" b="1">
+                <a:solidFill>
+                  <a:schemeClr val="tx1">
+                    <a:alpha val="80000"/>
+                  </a:schemeClr>
+                </a:solidFill>
+              </a:rPr>
+              <a:t>Features:</a:t>
+            </a:r>
+          </a:p>
+          <a:p>
+            <a:pPr>
+              <a:lnSpc>
+                <a:spcPct val="70000"/>
+              </a:lnSpc>
+            </a:pPr>
+            <a:r>
+              <a:rPr lang="en-US" sz="2200" dirty="0">
+                <a:solidFill>
+                  <a:schemeClr val="tx1">
+                    <a:alpha val="80000"/>
+                  </a:schemeClr>
+                </a:solidFill>
+              </a:rPr>
+              <a:t>Welcome message</a:t>
+            </a:r>
+          </a:p>
+          <a:p>
+            <a:pPr>
+              <a:lnSpc>
+                <a:spcPct val="70000"/>
+              </a:lnSpc>
+              <a:buFont typeface="Arial"/>
+            </a:pPr>
+            <a:r>
+              <a:rPr lang="en-US" sz="2200">
+                <a:solidFill>
+                  <a:schemeClr val="tx1">
+                    <a:alpha val="80000"/>
+                  </a:schemeClr>
+                </a:solidFill>
+              </a:rPr>
+              <a:t>Upcoming Tasks section</a:t>
+            </a:r>
+            <a:endParaRPr lang="en-US" sz="2200" dirty="0">
+              <a:solidFill>
+                <a:schemeClr val="tx1">
+                  <a:alpha val="80000"/>
+                </a:schemeClr>
+              </a:solidFill>
+            </a:endParaRPr>
+          </a:p>
+          <a:p>
+            <a:pPr>
+              <a:lnSpc>
+                <a:spcPct val="70000"/>
+              </a:lnSpc>
+            </a:pPr>
+            <a:r>
+              <a:rPr lang="en-US" sz="2200">
+                <a:solidFill>
+                  <a:schemeClr val="tx1">
+                    <a:alpha val="80000"/>
+                  </a:schemeClr>
+                </a:solidFill>
+              </a:rPr>
+              <a:t>Summary tracker:</a:t>
+            </a:r>
+            <a:endParaRPr lang="en-US" sz="2200" dirty="0">
+              <a:solidFill>
+                <a:schemeClr val="tx1">
+                  <a:alpha val="80000"/>
+                </a:schemeClr>
+              </a:solidFill>
+            </a:endParaRPr>
+          </a:p>
+          <a:p>
+            <a:pPr lvl="1">
+              <a:lnSpc>
+                <a:spcPct val="70000"/>
+              </a:lnSpc>
+              <a:buFont typeface="Courier New" panose="020B0604020202020204" pitchFamily="34" charset="0"/>
+              <a:buChar char="o"/>
+            </a:pPr>
+            <a:r>
+              <a:rPr lang="en-US" sz="2000">
+                <a:solidFill>
+                  <a:schemeClr val="tx1">
+                    <a:alpha val="80000"/>
+                  </a:schemeClr>
+                </a:solidFill>
+              </a:rPr>
+              <a:t>Total tasks</a:t>
+            </a:r>
+          </a:p>
+          <a:p>
+            <a:pPr lvl="1">
+              <a:lnSpc>
+                <a:spcPct val="70000"/>
+              </a:lnSpc>
+              <a:buFont typeface="Courier New" panose="020B0604020202020204" pitchFamily="34" charset="0"/>
+              <a:buChar char="o"/>
+            </a:pPr>
+            <a:r>
+              <a:rPr lang="en-US" sz="2000">
+                <a:solidFill>
+                  <a:schemeClr val="tx1">
+                    <a:alpha val="80000"/>
+                  </a:schemeClr>
+                </a:solidFill>
+              </a:rPr>
+              <a:t>Completed tasks</a:t>
+            </a:r>
+          </a:p>
+          <a:p>
+            <a:pPr lvl="1">
+              <a:lnSpc>
+                <a:spcPct val="70000"/>
+              </a:lnSpc>
+              <a:buFont typeface="Courier New" panose="020B0604020202020204" pitchFamily="34" charset="0"/>
+              <a:buChar char="o"/>
+            </a:pPr>
+            <a:r>
+              <a:rPr lang="en-US" sz="2000">
+                <a:solidFill>
+                  <a:schemeClr val="tx1">
+                    <a:alpha val="80000"/>
+                  </a:schemeClr>
+                </a:solidFill>
+              </a:rPr>
+              <a:t>Overdue tasks</a:t>
+            </a:r>
+            <a:endParaRPr lang="en-US" sz="2000" dirty="0">
+              <a:solidFill>
+                <a:schemeClr val="tx1">
+                  <a:alpha val="80000"/>
+                </a:schemeClr>
+              </a:solidFill>
+            </a:endParaRPr>
+          </a:p>
+          <a:p>
+            <a:pPr>
+              <a:lnSpc>
+                <a:spcPct val="70000"/>
+              </a:lnSpc>
+            </a:pPr>
+            <a:r>
+              <a:rPr lang="en-US" sz="2200">
+                <a:solidFill>
+                  <a:schemeClr val="tx1">
+                    <a:alpha val="80000"/>
+                  </a:schemeClr>
+                </a:solidFill>
+              </a:rPr>
+              <a:t>Add New Task button</a:t>
+            </a:r>
+          </a:p>
+          <a:p>
+            <a:pPr marL="0" indent="0">
+              <a:buNone/>
+            </a:pPr>
+            <a:endParaRPr lang="en-US" sz="2400" dirty="0">
+              <a:solidFill>
+                <a:srgbClr val="000000">
+                  <a:alpha val="80000"/>
+                </a:srgbClr>
+              </a:solidFill>
+            </a:endParaRPr>
+          </a:p>
+        </p:txBody>
+      </p:sp>
+      <p:pic>
+        <p:nvPicPr>
+          <p:cNvPr id="4" name="Content Placeholder 3" descr="A screenshot of a cell phone&#10;&#10;AI-generated content may be incorrect.">
+            <a:extLst>
+              <a:ext uri="{FF2B5EF4-FFF2-40B4-BE49-F238E27FC236}">
+                <a16:creationId xmlns:a16="http://schemas.microsoft.com/office/drawing/2014/main" id="{23F0594B-8061-FFA7-392A-77BE59E4DF68}"/>
+              </a:ext>
+            </a:extLst>
+          </p:cNvPr>
+          <p:cNvPicPr>
+            <a:picLocks noChangeAspect="1"/>
+          </p:cNvPicPr>
+          <p:nvPr/>
+        </p:nvPicPr>
+        <p:blipFill>
+          <a:blip r:embed="rId2"/>
+          <a:stretch>
+            <a:fillRect/>
+          </a:stretch>
+        </p:blipFill>
+        <p:spPr>
+          <a:xfrm>
+            <a:off x="7992385" y="1336390"/>
+            <a:ext cx="2708940" cy="4837394"/>
+          </a:xfrm>
+          <a:prstGeom prst="rect">
+            <a:avLst/>
+          </a:prstGeom>
+        </p:spPr>
+      </p:pic>
+      <p:sp>
+        <p:nvSpPr>
+          <p:cNvPr id="15" name="Graphic 11">
+            <a:extLst>
+              <a:ext uri="{FF2B5EF4-FFF2-40B4-BE49-F238E27FC236}">
+                <a16:creationId xmlns:a16="http://schemas.microsoft.com/office/drawing/2014/main" id="{6CB927A4-E432-4310-9CD5-E89FF5063179}"/>
+              </a:ext>
+              <a:ext uri="{C183D7F6-B498-43B3-948B-1728B52AA6E4}">
+                <adec:decorative xmlns:adec="http://schemas.microsoft.com/office/drawing/2017/decorative" val="1"/>
+              </a:ext>
+            </a:extLst>
+          </p:cNvPr>
+          <p:cNvSpPr>
+            <a:spLocks noGrp="1" noRot="1" noChangeAspect="1" noMove="1" noResize="1" noEditPoints="1" noAdjustHandles="1" noChangeArrowheads="1" noChangeShapeType="1" noTextEdit="1"/>
+          </p:cNvSpPr>
+          <p:nvPr>
+            <p:extLst>
+              <p:ext uri="{386F3935-93C4-4BCD-93E2-E3B085C9AB24}">
+                <p16:designElem xmlns:p16="http://schemas.microsoft.com/office/powerpoint/2015/main" val="1"/>
+              </p:ext>
+            </p:extLst>
+          </p:nvPr>
+        </p:nvSpPr>
+        <p:spPr>
+          <a:xfrm>
+            <a:off x="10924552" y="1899284"/>
+            <a:ext cx="139039" cy="139039"/>
+          </a:xfrm>
+          <a:custGeom>
+            <a:avLst/>
+            <a:gdLst>
+              <a:gd name="connsiteX0" fmla="*/ 129602 w 139039"/>
+              <a:gd name="connsiteY0" fmla="*/ 60082 h 139039"/>
+              <a:gd name="connsiteX1" fmla="*/ 78957 w 139039"/>
+              <a:gd name="connsiteY1" fmla="*/ 60082 h 139039"/>
+              <a:gd name="connsiteX2" fmla="*/ 78957 w 139039"/>
+              <a:gd name="connsiteY2" fmla="*/ 9437 h 139039"/>
+              <a:gd name="connsiteX3" fmla="*/ 69520 w 139039"/>
+              <a:gd name="connsiteY3" fmla="*/ 0 h 139039"/>
+              <a:gd name="connsiteX4" fmla="*/ 60082 w 139039"/>
+              <a:gd name="connsiteY4" fmla="*/ 9437 h 139039"/>
+              <a:gd name="connsiteX5" fmla="*/ 60082 w 139039"/>
+              <a:gd name="connsiteY5" fmla="*/ 60082 h 139039"/>
+              <a:gd name="connsiteX6" fmla="*/ 9437 w 139039"/>
+              <a:gd name="connsiteY6" fmla="*/ 60082 h 139039"/>
+              <a:gd name="connsiteX7" fmla="*/ 0 w 139039"/>
+              <a:gd name="connsiteY7" fmla="*/ 69520 h 139039"/>
+              <a:gd name="connsiteX8" fmla="*/ 9437 w 139039"/>
+              <a:gd name="connsiteY8" fmla="*/ 78957 h 139039"/>
+              <a:gd name="connsiteX9" fmla="*/ 60082 w 139039"/>
+              <a:gd name="connsiteY9" fmla="*/ 78957 h 139039"/>
+              <a:gd name="connsiteX10" fmla="*/ 60082 w 139039"/>
+              <a:gd name="connsiteY10" fmla="*/ 129602 h 139039"/>
+              <a:gd name="connsiteX11" fmla="*/ 69520 w 139039"/>
+              <a:gd name="connsiteY11" fmla="*/ 139039 h 139039"/>
+              <a:gd name="connsiteX12" fmla="*/ 78957 w 139039"/>
+              <a:gd name="connsiteY12" fmla="*/ 129602 h 139039"/>
+              <a:gd name="connsiteX13" fmla="*/ 78957 w 139039"/>
+              <a:gd name="connsiteY13" fmla="*/ 78957 h 139039"/>
+              <a:gd name="connsiteX14" fmla="*/ 129602 w 139039"/>
+              <a:gd name="connsiteY14" fmla="*/ 78957 h 139039"/>
+              <a:gd name="connsiteX15" fmla="*/ 139039 w 139039"/>
+              <a:gd name="connsiteY15" fmla="*/ 69520 h 139039"/>
+              <a:gd name="connsiteX16" fmla="*/ 129602 w 139039"/>
+              <a:gd name="connsiteY16" fmla="*/ 60082 h 139039"/>
+            </a:gdLst>
+            <a:ahLst/>
+            <a:cxnLst>
+              <a:cxn ang="0">
+                <a:pos x="connsiteX0" y="connsiteY0"/>
+              </a:cxn>
+              <a:cxn ang="0">
+                <a:pos x="connsiteX1" y="connsiteY1"/>
+              </a:cxn>
+              <a:cxn ang="0">
+                <a:pos x="connsiteX2" y="connsiteY2"/>
+              </a:cxn>
+              <a:cxn ang="0">
+                <a:pos x="connsiteX3" y="connsiteY3"/>
+              </a:cxn>
+              <a:cxn ang="0">
+                <a:pos x="connsiteX4" y="connsiteY4"/>
+              </a:cxn>
+              <a:cxn ang="0">
+                <a:pos x="connsiteX5" y="connsiteY5"/>
+              </a:cxn>
+              <a:cxn ang="0">
+                <a:pos x="connsiteX6" y="connsiteY6"/>
+              </a:cxn>
+              <a:cxn ang="0">
+                <a:pos x="connsiteX7" y="connsiteY7"/>
+              </a:cxn>
+              <a:cxn ang="0">
+                <a:pos x="connsiteX8" y="connsiteY8"/>
+              </a:cxn>
+              <a:cxn ang="0">
+                <a:pos x="connsiteX9" y="connsiteY9"/>
+              </a:cxn>
+              <a:cxn ang="0">
+                <a:pos x="connsiteX10" y="connsiteY10"/>
+              </a:cxn>
+              <a:cxn ang="0">
+                <a:pos x="connsiteX11" y="connsiteY11"/>
+              </a:cxn>
+              <a:cxn ang="0">
+                <a:pos x="connsiteX12" y="connsiteY12"/>
+              </a:cxn>
+              <a:cxn ang="0">
+                <a:pos x="connsiteX13" y="connsiteY13"/>
+              </a:cxn>
+              <a:cxn ang="0">
+                <a:pos x="connsiteX14" y="connsiteY14"/>
+              </a:cxn>
+              <a:cxn ang="0">
+                <a:pos x="connsiteX15" y="connsiteY15"/>
+              </a:cxn>
+              <a:cxn ang="0">
+                <a:pos x="connsiteX16" y="connsiteY16"/>
+              </a:cxn>
+            </a:cxnLst>
+            <a:rect l="l" t="t" r="r" b="b"/>
+            <a:pathLst>
+              <a:path w="139039" h="139039">
+                <a:moveTo>
+                  <a:pt x="129602" y="60082"/>
+                </a:moveTo>
+                <a:lnTo>
+                  <a:pt x="78957" y="60082"/>
+                </a:lnTo>
+                <a:lnTo>
+                  <a:pt x="78957" y="9437"/>
+                </a:lnTo>
+                <a:cubicBezTo>
+                  <a:pt x="78957" y="4225"/>
+                  <a:pt x="74731" y="0"/>
+                  <a:pt x="69520" y="0"/>
+                </a:cubicBezTo>
+                <a:cubicBezTo>
+                  <a:pt x="64308" y="0"/>
+                  <a:pt x="60082" y="4225"/>
+                  <a:pt x="60082" y="9437"/>
+                </a:cubicBezTo>
+                <a:lnTo>
+                  <a:pt x="60082" y="60082"/>
+                </a:lnTo>
+                <a:lnTo>
+                  <a:pt x="9437" y="60082"/>
+                </a:lnTo>
+                <a:cubicBezTo>
+                  <a:pt x="4225" y="60082"/>
+                  <a:pt x="0" y="64308"/>
+                  <a:pt x="0" y="69520"/>
+                </a:cubicBezTo>
+                <a:cubicBezTo>
+                  <a:pt x="0" y="74731"/>
+                  <a:pt x="4225" y="78957"/>
+                  <a:pt x="9437" y="78957"/>
+                </a:cubicBezTo>
+                <a:lnTo>
+                  <a:pt x="60082" y="78957"/>
+                </a:lnTo>
+                <a:lnTo>
+                  <a:pt x="60082" y="129602"/>
+                </a:lnTo>
+                <a:cubicBezTo>
+                  <a:pt x="60082" y="134814"/>
+                  <a:pt x="64308" y="139039"/>
+                  <a:pt x="69520" y="139039"/>
+                </a:cubicBezTo>
+                <a:cubicBezTo>
+                  <a:pt x="74731" y="139039"/>
+                  <a:pt x="78957" y="134814"/>
+                  <a:pt x="78957" y="129602"/>
+                </a:cubicBezTo>
+                <a:lnTo>
+                  <a:pt x="78957" y="78957"/>
+                </a:lnTo>
+                <a:lnTo>
+                  <a:pt x="129602" y="78957"/>
+                </a:lnTo>
+                <a:cubicBezTo>
+                  <a:pt x="134814" y="78957"/>
+                  <a:pt x="139039" y="74731"/>
+                  <a:pt x="139039" y="69520"/>
+                </a:cubicBezTo>
+                <a:cubicBezTo>
+                  <a:pt x="139039" y="64308"/>
+                  <a:pt x="134814" y="60082"/>
+                  <a:pt x="129602" y="60082"/>
+                </a:cubicBezTo>
+                <a:close/>
+              </a:path>
+            </a:pathLst>
+          </a:custGeom>
+          <a:solidFill>
+            <a:schemeClr val="accent1"/>
+          </a:solidFill>
+          <a:ln w="603" cap="flat">
+            <a:noFill/>
+            <a:prstDash val="solid"/>
+            <a:miter/>
+          </a:ln>
+        </p:spPr>
+        <p:txBody>
+          <a:bodyPr rtlCol="0" anchor="ctr"/>
+          <a:lstStyle/>
+          <a:p>
+            <a:endParaRPr lang="en-US"/>
+          </a:p>
+        </p:txBody>
+      </p:sp>
+      <p:sp>
+        <p:nvSpPr>
+          <p:cNvPr id="17" name="Graphic 10">
+            <a:extLst>
+              <a:ext uri="{FF2B5EF4-FFF2-40B4-BE49-F238E27FC236}">
+                <a16:creationId xmlns:a16="http://schemas.microsoft.com/office/drawing/2014/main" id="{E3020543-B24B-4EC4-8FFC-8DD88EEA91A8}"/>
+              </a:ext>
+              <a:ext uri="{C183D7F6-B498-43B3-948B-1728B52AA6E4}">
+                <adec:decorative xmlns:adec="http://schemas.microsoft.com/office/drawing/2017/decorative" val="1"/>
+              </a:ext>
+            </a:extLst>
+          </p:cNvPr>
+          <p:cNvSpPr>
+            <a:spLocks noGrp="1" noRot="1" noChangeAspect="1" noMove="1" noResize="1" noEditPoints="1" noAdjustHandles="1" noChangeArrowheads="1" noChangeShapeType="1" noTextEdit="1"/>
+          </p:cNvSpPr>
+          <p:nvPr>
+            <p:extLst>
+              <p:ext uri="{386F3935-93C4-4BCD-93E2-E3B085C9AB24}">
+                <p16:designElem xmlns:p16="http://schemas.microsoft.com/office/powerpoint/2015/main" val="1"/>
+              </p:ext>
+            </p:extLst>
+          </p:nvPr>
+        </p:nvSpPr>
+        <p:spPr>
+          <a:xfrm>
+            <a:off x="11236862" y="2189928"/>
+            <a:ext cx="91138" cy="91138"/>
+          </a:xfrm>
+          <a:custGeom>
+            <a:avLst/>
+            <a:gdLst>
+              <a:gd name="connsiteX0" fmla="*/ 91138 w 91138"/>
+              <a:gd name="connsiteY0" fmla="*/ 45569 h 91138"/>
+              <a:gd name="connsiteX1" fmla="*/ 45569 w 91138"/>
+              <a:gd name="connsiteY1" fmla="*/ 91138 h 91138"/>
+              <a:gd name="connsiteX2" fmla="*/ 0 w 91138"/>
+              <a:gd name="connsiteY2" fmla="*/ 45569 h 91138"/>
+              <a:gd name="connsiteX3" fmla="*/ 45569 w 91138"/>
+              <a:gd name="connsiteY3" fmla="*/ 0 h 91138"/>
+              <a:gd name="connsiteX4" fmla="*/ 91138 w 91138"/>
+              <a:gd name="connsiteY4" fmla="*/ 45569 h 91138"/>
+            </a:gdLst>
+            <a:ahLst/>
+            <a:cxnLst>
+              <a:cxn ang="0">
+                <a:pos x="connsiteX0" y="connsiteY0"/>
+              </a:cxn>
+              <a:cxn ang="0">
+                <a:pos x="connsiteX1" y="connsiteY1"/>
+              </a:cxn>
+              <a:cxn ang="0">
+                <a:pos x="connsiteX2" y="connsiteY2"/>
+              </a:cxn>
+              <a:cxn ang="0">
+                <a:pos x="connsiteX3" y="connsiteY3"/>
+              </a:cxn>
+              <a:cxn ang="0">
+                <a:pos x="connsiteX4" y="connsiteY4"/>
+              </a:cxn>
+            </a:cxnLst>
+            <a:rect l="l" t="t" r="r" b="b"/>
+            <a:pathLst>
+              <a:path w="91138" h="91138">
+                <a:moveTo>
+                  <a:pt x="91138" y="45569"/>
+                </a:moveTo>
+                <a:cubicBezTo>
+                  <a:pt x="91138" y="70736"/>
+                  <a:pt x="70736" y="91138"/>
+                  <a:pt x="45569" y="91138"/>
+                </a:cubicBezTo>
+                <a:cubicBezTo>
+                  <a:pt x="20402" y="91138"/>
+                  <a:pt x="0" y="70736"/>
+                  <a:pt x="0" y="45569"/>
+                </a:cubicBezTo>
+                <a:cubicBezTo>
+                  <a:pt x="0" y="20402"/>
+                  <a:pt x="20402" y="0"/>
+                  <a:pt x="45569" y="0"/>
+                </a:cubicBezTo>
+                <a:cubicBezTo>
+                  <a:pt x="70736" y="0"/>
+                  <a:pt x="91138" y="20402"/>
+                  <a:pt x="91138" y="45569"/>
+                </a:cubicBezTo>
+                <a:close/>
+              </a:path>
+            </a:pathLst>
+          </a:custGeom>
+          <a:solidFill>
+            <a:schemeClr val="accent1"/>
+          </a:solidFill>
+          <a:ln w="422" cap="flat">
+            <a:noFill/>
+            <a:prstDash val="solid"/>
+            <a:miter/>
+          </a:ln>
+        </p:spPr>
+        <p:txBody>
+          <a:bodyPr rtlCol="0" anchor="ctr"/>
+          <a:lstStyle/>
+          <a:p>
+            <a:endParaRPr lang="en-US"/>
+          </a:p>
+        </p:txBody>
+      </p:sp>
+    </p:spTree>
+    <p:extLst>
+      <p:ext uri="{BB962C8B-B14F-4D97-AF65-F5344CB8AC3E}">
+        <p14:creationId xmlns:p14="http://schemas.microsoft.com/office/powerpoint/2010/main" val="2073682223"/>
+      </p:ext>
+    </p:extLst>
+  </p:cSld>
+  <p:clrMapOvr>
+    <a:masterClrMapping/>
+  </p:clrMapOvr>
+</p:sld>
+</file>
+
+<file path=ppt/slides/slide7.xml><?xml version="1.0" encoding="utf-8"?>
+<p:sld xmlns:a="http://schemas.openxmlformats.org/drawingml/2006/main" xmlns:r="http://schemas.openxmlformats.org/officeDocument/2006/relationships" xmlns:p="http://schemas.openxmlformats.org/presentationml/2006/main">
+  <p:cSld>
+    <p:bg>
+      <p:bgPr>
+        <a:solidFill>
+          <a:srgbClr val="ADD3F5"/>
+        </a:solidFill>
+        <a:effectLst/>
+      </p:bgPr>
+    </p:bg>
+    <p:spTree>
+      <p:nvGrpSpPr>
+        <p:cNvPr id="1" name=""/>
+        <p:cNvGrpSpPr/>
+        <p:nvPr/>
+      </p:nvGrpSpPr>
+      <p:grpSpPr>
+        <a:xfrm>
+          <a:off x="0" y="0"/>
+          <a:ext cx="0" cy="0"/>
+          <a:chOff x="0" y="0"/>
+          <a:chExt cx="0" cy="0"/>
+        </a:xfrm>
+      </p:grpSpPr>
+      <p:sp useBgFill="1">
+        <p:nvSpPr>
+          <p:cNvPr id="11" name="Rectangle 10">
+            <a:extLst>
+              <a:ext uri="{FF2B5EF4-FFF2-40B4-BE49-F238E27FC236}">
+                <a16:creationId xmlns:a16="http://schemas.microsoft.com/office/drawing/2014/main" id="{8D1AA55E-40D5-461B-A5A8-4AE8AAB71B08}"/>
+              </a:ext>
+              <a:ext uri="{C183D7F6-B498-43B3-948B-1728B52AA6E4}">
+                <adec:decorative xmlns:adec="http://schemas.microsoft.com/office/drawing/2017/decorative" val="1"/>
+              </a:ext>
+            </a:extLst>
+          </p:cNvPr>
+          <p:cNvSpPr>
+            <a:spLocks noGrp="1" noRot="1" noChangeAspect="1" noMove="1" noResize="1" noEditPoints="1" noAdjustHandles="1" noChangeArrowheads="1" noChangeShapeType="1" noTextEdit="1"/>
+          </p:cNvSpPr>
+          <p:nvPr>
+            <p:extLst>
+              <p:ext uri="{386F3935-93C4-4BCD-93E2-E3B085C9AB24}">
+                <p16:designElem xmlns:p16="http://schemas.microsoft.com/office/powerpoint/2015/main" val="1"/>
+              </p:ext>
+            </p:extLst>
+          </p:nvPr>
+        </p:nvSpPr>
+        <p:spPr>
+          <a:xfrm>
+            <a:off x="0" y="0"/>
+            <a:ext cx="12192000" cy="6858000"/>
+          </a:xfrm>
+          <a:prstGeom prst="rect">
+            <a:avLst/>
+          </a:prstGeom>
+          <a:ln>
+            <a:noFill/>
+          </a:ln>
+        </p:spPr>
+        <p:style>
+          <a:lnRef idx="2">
+            <a:schemeClr val="accent1">
+              <a:shade val="50000"/>
+            </a:schemeClr>
+          </a:lnRef>
+          <a:fillRef idx="1">
+            <a:schemeClr val="accent1"/>
+          </a:fillRef>
+          <a:effectRef idx="0">
+            <a:schemeClr val="accent1"/>
+          </a:effectRef>
+          <a:fontRef idx="minor">
+            <a:schemeClr val="lt1"/>
+          </a:fontRef>
+        </p:style>
+        <p:txBody>
+          <a:bodyPr rtlCol="0" anchor="ctr"/>
+          <a:lstStyle/>
+          <a:p>
+            <a:pPr algn="ctr"/>
+            <a:endParaRPr lang="en-US" dirty="0"/>
+          </a:p>
+        </p:txBody>
+      </p:sp>
+      <p:sp>
+        <p:nvSpPr>
+          <p:cNvPr id="2" name="Title 1">
+            <a:extLst>
+              <a:ext uri="{FF2B5EF4-FFF2-40B4-BE49-F238E27FC236}">
+                <a16:creationId xmlns:a16="http://schemas.microsoft.com/office/drawing/2014/main" id="{A003706B-35AD-B70D-1C39-4D57317E7F9A}"/>
+              </a:ext>
+            </a:extLst>
+          </p:cNvPr>
+          <p:cNvSpPr>
+            <a:spLocks noGrp="1"/>
+          </p:cNvSpPr>
+          <p:nvPr>
+            <p:ph type="title"/>
+          </p:nvPr>
+        </p:nvSpPr>
+        <p:spPr>
+          <a:xfrm>
+            <a:off x="447908" y="1336390"/>
+            <a:ext cx="7456962" cy="1182927"/>
+          </a:xfrm>
+        </p:spPr>
+        <p:txBody>
+          <a:bodyPr anchor="b">
+            <a:noAutofit/>
+          </a:bodyPr>
+          <a:lstStyle/>
+          <a:p>
+            <a:r>
+              <a:rPr lang="en-CA" sz="5600">
+                <a:latin typeface="Amasis MT Pro Black"/>
+              </a:rPr>
+              <a:t>Add/Edit Task Page</a:t>
+            </a:r>
+            <a:endParaRPr lang="en-US" sz="5600"/>
+          </a:p>
+        </p:txBody>
+      </p:sp>
+      <p:cxnSp>
+        <p:nvCxnSpPr>
+          <p:cNvPr id="13" name="Straight Connector 12">
+            <a:extLst>
+              <a:ext uri="{FF2B5EF4-FFF2-40B4-BE49-F238E27FC236}">
+                <a16:creationId xmlns:a16="http://schemas.microsoft.com/office/drawing/2014/main" id="{7EB498BD-8089-4626-91EA-4978EBEF535E}"/>
+              </a:ext>
+              <a:ext uri="{C183D7F6-B498-43B3-948B-1728B52AA6E4}">
+                <adec:decorative xmlns:adec="http://schemas.microsoft.com/office/drawing/2017/decorative" val="1"/>
+              </a:ext>
+            </a:extLst>
+          </p:cNvPr>
+          <p:cNvCxnSpPr>
+            <a:cxnSpLocks noGrp="1" noRot="1" noChangeAspect="1" noMove="1" noResize="1" noEditPoints="1" noAdjustHandles="1" noChangeArrowheads="1" noChangeShapeType="1"/>
+          </p:cNvCxnSpPr>
+          <p:nvPr>
+            <p:extLst>
+              <p:ext uri="{386F3935-93C4-4BCD-93E2-E3B085C9AB24}">
+                <p16:designElem xmlns:p16="http://schemas.microsoft.com/office/powerpoint/2015/main" val="1"/>
+              </p:ext>
+            </p:extLst>
+          </p:nvPr>
+        </p:nvCxnSpPr>
+        <p:spPr>
+          <a:xfrm>
+            <a:off x="0" y="806470"/>
+            <a:ext cx="7903723" cy="0"/>
+          </a:xfrm>
+          <a:prstGeom prst="line">
+            <a:avLst/>
+          </a:prstGeom>
+          <a:ln w="25400" cap="sq">
+            <a:gradFill flip="none" rotWithShape="1">
+              <a:gsLst>
+                <a:gs pos="0">
+                  <a:schemeClr val="accent1"/>
+                </a:gs>
+                <a:gs pos="100000">
+                  <a:schemeClr val="accent2"/>
+                </a:gs>
+              </a:gsLst>
+              <a:lin ang="10800000" scaled="0"/>
+              <a:tileRect/>
+            </a:gradFill>
+            <a:bevel/>
+          </a:ln>
+        </p:spPr>
+        <p:style>
+          <a:lnRef idx="1">
+            <a:schemeClr val="accent1"/>
+          </a:lnRef>
+          <a:fillRef idx="0">
+            <a:schemeClr val="accent1"/>
+          </a:fillRef>
+          <a:effectRef idx="0">
+            <a:schemeClr val="accent1"/>
+          </a:effectRef>
+          <a:fontRef idx="minor">
+            <a:schemeClr val="tx1"/>
+          </a:fontRef>
+        </p:style>
+      </p:cxnSp>
+      <p:sp>
+        <p:nvSpPr>
+          <p:cNvPr id="8" name="Content Placeholder 7">
+            <a:extLst>
+              <a:ext uri="{FF2B5EF4-FFF2-40B4-BE49-F238E27FC236}">
+                <a16:creationId xmlns:a16="http://schemas.microsoft.com/office/drawing/2014/main" id="{62364360-F20B-BE5E-D3A0-4F4C8539652D}"/>
+              </a:ext>
+            </a:extLst>
+          </p:cNvPr>
+          <p:cNvSpPr>
+            <a:spLocks noGrp="1"/>
+          </p:cNvSpPr>
+          <p:nvPr>
+            <p:ph idx="1"/>
+          </p:nvPr>
+        </p:nvSpPr>
+        <p:spPr>
+          <a:xfrm>
+            <a:off x="803776" y="2829330"/>
+            <a:ext cx="6190412" cy="3344459"/>
+          </a:xfrm>
+        </p:spPr>
+        <p:txBody>
+          <a:bodyPr anchor="t">
+            <a:normAutofit lnSpcReduction="10000"/>
+          </a:bodyPr>
+          <a:lstStyle/>
+          <a:p>
+            <a:pPr marL="0" indent="0">
+              <a:buNone/>
+            </a:pPr>
+            <a:r>
+              <a:rPr lang="en-US" b="1">
+                <a:solidFill>
+                  <a:schemeClr val="tx1">
+                    <a:alpha val="80000"/>
+                  </a:schemeClr>
+                </a:solidFill>
+              </a:rPr>
+              <a:t>Features:</a:t>
+            </a:r>
+          </a:p>
+          <a:p>
+            <a:r>
+              <a:rPr lang="en-US" sz="2200">
+                <a:solidFill>
+                  <a:schemeClr val="tx1">
+                    <a:alpha val="80000"/>
+                  </a:schemeClr>
+                </a:solidFill>
+              </a:rPr>
+              <a:t>Input boxes:</a:t>
+            </a:r>
+          </a:p>
+          <a:p>
+            <a:pPr lvl="1">
+              <a:buFont typeface="Courier New" panose="020B0604020202020204" pitchFamily="34" charset="0"/>
+              <a:buChar char="o"/>
+            </a:pPr>
+            <a:r>
+              <a:rPr lang="en-US" sz="2000">
+                <a:solidFill>
+                  <a:schemeClr val="tx1">
+                    <a:alpha val="80000"/>
+                  </a:schemeClr>
+                </a:solidFill>
+              </a:rPr>
+              <a:t>Task Title</a:t>
+            </a:r>
+          </a:p>
+          <a:p>
+            <a:pPr lvl="1">
+              <a:buFont typeface="Courier New" panose="020B0604020202020204" pitchFamily="34" charset="0"/>
+              <a:buChar char="o"/>
+            </a:pPr>
+            <a:r>
+              <a:rPr lang="en-US" sz="2000">
+                <a:solidFill>
+                  <a:schemeClr val="tx1">
+                    <a:alpha val="80000"/>
+                  </a:schemeClr>
+                </a:solidFill>
+              </a:rPr>
+              <a:t>Course/Subject</a:t>
+            </a:r>
+          </a:p>
+          <a:p>
+            <a:pPr lvl="1">
+              <a:buFont typeface="Courier New" panose="020B0604020202020204" pitchFamily="34" charset="0"/>
+              <a:buChar char="o"/>
+            </a:pPr>
+            <a:r>
+              <a:rPr lang="en-US" sz="2000">
+                <a:solidFill>
+                  <a:schemeClr val="tx1">
+                    <a:alpha val="80000"/>
+                  </a:schemeClr>
+                </a:solidFill>
+              </a:rPr>
+              <a:t>Due Date</a:t>
+            </a:r>
+          </a:p>
+          <a:p>
+            <a:pPr lvl="1">
+              <a:buFont typeface="Courier New" panose="020B0604020202020204" pitchFamily="34" charset="0"/>
+              <a:buChar char="o"/>
+            </a:pPr>
+            <a:r>
+              <a:rPr lang="en-US" sz="2000">
+                <a:solidFill>
+                  <a:schemeClr val="tx1">
+                    <a:alpha val="80000"/>
+                  </a:schemeClr>
+                </a:solidFill>
+              </a:rPr>
+              <a:t>Priority selectors</a:t>
+            </a:r>
+          </a:p>
+          <a:p>
+            <a:pPr lvl="1">
+              <a:buFont typeface="Courier New" panose="020B0604020202020204" pitchFamily="34" charset="0"/>
+              <a:buChar char="o"/>
+            </a:pPr>
+            <a:r>
+              <a:rPr lang="en-US" sz="2000">
+                <a:solidFill>
+                  <a:schemeClr val="tx1">
+                    <a:alpha val="80000"/>
+                  </a:schemeClr>
+                </a:solidFill>
+              </a:rPr>
+              <a:t>Area for extra notes</a:t>
+            </a:r>
+          </a:p>
+          <a:p>
+            <a:r>
+              <a:rPr lang="en-US" sz="2200">
+                <a:solidFill>
+                  <a:schemeClr val="tx1">
+                    <a:alpha val="80000"/>
+                  </a:schemeClr>
+                </a:solidFill>
+              </a:rPr>
+              <a:t>Pre-filled field hints</a:t>
+            </a:r>
+            <a:endParaRPr lang="en-US" sz="2200" dirty="0">
+              <a:solidFill>
+                <a:schemeClr val="tx1">
+                  <a:alpha val="80000"/>
+                </a:schemeClr>
+              </a:solidFill>
+            </a:endParaRPr>
+          </a:p>
+          <a:p>
+            <a:r>
+              <a:rPr lang="en-US" sz="2200">
+                <a:solidFill>
+                  <a:schemeClr val="tx1">
+                    <a:alpha val="80000"/>
+                  </a:schemeClr>
+                </a:solidFill>
+              </a:rPr>
+              <a:t>Save / Cancel buttons</a:t>
+            </a:r>
+          </a:p>
+          <a:p>
+            <a:pPr marL="0" indent="0">
+              <a:buNone/>
+            </a:pPr>
+            <a:endParaRPr lang="en-US" sz="2400" dirty="0">
+              <a:solidFill>
+                <a:schemeClr val="tx1">
+                  <a:alpha val="80000"/>
+                </a:schemeClr>
+              </a:solidFill>
+            </a:endParaRPr>
+          </a:p>
+          <a:p>
+            <a:pPr marL="0" indent="0">
+              <a:buNone/>
+            </a:pPr>
+            <a:endParaRPr lang="en-US" sz="2400" b="1" dirty="0">
+              <a:solidFill>
+                <a:srgbClr val="000000">
+                  <a:alpha val="80000"/>
+                </a:srgbClr>
+              </a:solidFill>
+            </a:endParaRPr>
+          </a:p>
+        </p:txBody>
+      </p:sp>
+      <p:pic>
+        <p:nvPicPr>
+          <p:cNvPr id="4" name="Content Placeholder 3" descr="A screenshot of a computer&#10;&#10;AI-generated content may be incorrect.">
+            <a:extLst>
+              <a:ext uri="{FF2B5EF4-FFF2-40B4-BE49-F238E27FC236}">
+                <a16:creationId xmlns:a16="http://schemas.microsoft.com/office/drawing/2014/main" id="{BB94BA8E-F8DD-E6A6-4FBC-BE3E699DDDF8}"/>
+              </a:ext>
+            </a:extLst>
+          </p:cNvPr>
+          <p:cNvPicPr>
+            <a:picLocks noChangeAspect="1"/>
+          </p:cNvPicPr>
+          <p:nvPr/>
+        </p:nvPicPr>
+        <p:blipFill>
+          <a:blip r:embed="rId2"/>
+          <a:stretch>
+            <a:fillRect/>
+          </a:stretch>
+        </p:blipFill>
+        <p:spPr>
+          <a:xfrm>
+            <a:off x="8107273" y="1336390"/>
+            <a:ext cx="2479164" cy="4837394"/>
+          </a:xfrm>
+          <a:prstGeom prst="rect">
+            <a:avLst/>
+          </a:prstGeom>
+        </p:spPr>
+      </p:pic>
+      <p:sp>
+        <p:nvSpPr>
+          <p:cNvPr id="15" name="Graphic 11">
+            <a:extLst>
+              <a:ext uri="{FF2B5EF4-FFF2-40B4-BE49-F238E27FC236}">
+                <a16:creationId xmlns:a16="http://schemas.microsoft.com/office/drawing/2014/main" id="{6CB927A4-E432-4310-9CD5-E89FF5063179}"/>
+              </a:ext>
+              <a:ext uri="{C183D7F6-B498-43B3-948B-1728B52AA6E4}">
+                <adec:decorative xmlns:adec="http://schemas.microsoft.com/office/drawing/2017/decorative" val="1"/>
+              </a:ext>
+            </a:extLst>
+          </p:cNvPr>
+          <p:cNvSpPr>
+            <a:spLocks noGrp="1" noRot="1" noChangeAspect="1" noMove="1" noResize="1" noEditPoints="1" noAdjustHandles="1" noChangeArrowheads="1" noChangeShapeType="1" noTextEdit="1"/>
+          </p:cNvSpPr>
+          <p:nvPr>
+            <p:extLst>
+              <p:ext uri="{386F3935-93C4-4BCD-93E2-E3B085C9AB24}">
+                <p16:designElem xmlns:p16="http://schemas.microsoft.com/office/powerpoint/2015/main" val="1"/>
+              </p:ext>
+            </p:extLst>
+          </p:nvPr>
+        </p:nvSpPr>
+        <p:spPr>
+          <a:xfrm>
+            <a:off x="10924552" y="1899284"/>
+            <a:ext cx="139039" cy="139039"/>
+          </a:xfrm>
+          <a:custGeom>
+            <a:avLst/>
+            <a:gdLst>
+              <a:gd name="connsiteX0" fmla="*/ 129602 w 139039"/>
+              <a:gd name="connsiteY0" fmla="*/ 60082 h 139039"/>
+              <a:gd name="connsiteX1" fmla="*/ 78957 w 139039"/>
+              <a:gd name="connsiteY1" fmla="*/ 60082 h 139039"/>
+              <a:gd name="connsiteX2" fmla="*/ 78957 w 139039"/>
+              <a:gd name="connsiteY2" fmla="*/ 9437 h 139039"/>
+              <a:gd name="connsiteX3" fmla="*/ 69520 w 139039"/>
+              <a:gd name="connsiteY3" fmla="*/ 0 h 139039"/>
+              <a:gd name="connsiteX4" fmla="*/ 60082 w 139039"/>
+              <a:gd name="connsiteY4" fmla="*/ 9437 h 139039"/>
+              <a:gd name="connsiteX5" fmla="*/ 60082 w 139039"/>
+              <a:gd name="connsiteY5" fmla="*/ 60082 h 139039"/>
+              <a:gd name="connsiteX6" fmla="*/ 9437 w 139039"/>
+              <a:gd name="connsiteY6" fmla="*/ 60082 h 139039"/>
+              <a:gd name="connsiteX7" fmla="*/ 0 w 139039"/>
+              <a:gd name="connsiteY7" fmla="*/ 69520 h 139039"/>
+              <a:gd name="connsiteX8" fmla="*/ 9437 w 139039"/>
+              <a:gd name="connsiteY8" fmla="*/ 78957 h 139039"/>
+              <a:gd name="connsiteX9" fmla="*/ 60082 w 139039"/>
+              <a:gd name="connsiteY9" fmla="*/ 78957 h 139039"/>
+              <a:gd name="connsiteX10" fmla="*/ 60082 w 139039"/>
+              <a:gd name="connsiteY10" fmla="*/ 129602 h 139039"/>
+              <a:gd name="connsiteX11" fmla="*/ 69520 w 139039"/>
+              <a:gd name="connsiteY11" fmla="*/ 139039 h 139039"/>
+              <a:gd name="connsiteX12" fmla="*/ 78957 w 139039"/>
+              <a:gd name="connsiteY12" fmla="*/ 129602 h 139039"/>
+              <a:gd name="connsiteX13" fmla="*/ 78957 w 139039"/>
+              <a:gd name="connsiteY13" fmla="*/ 78957 h 139039"/>
+              <a:gd name="connsiteX14" fmla="*/ 129602 w 139039"/>
+              <a:gd name="connsiteY14" fmla="*/ 78957 h 139039"/>
+              <a:gd name="connsiteX15" fmla="*/ 139039 w 139039"/>
+              <a:gd name="connsiteY15" fmla="*/ 69520 h 139039"/>
+              <a:gd name="connsiteX16" fmla="*/ 129602 w 139039"/>
+              <a:gd name="connsiteY16" fmla="*/ 60082 h 139039"/>
+            </a:gdLst>
+            <a:ahLst/>
+            <a:cxnLst>
+              <a:cxn ang="0">
+                <a:pos x="connsiteX0" y="connsiteY0"/>
+              </a:cxn>
+              <a:cxn ang="0">
+                <a:pos x="connsiteX1" y="connsiteY1"/>
+              </a:cxn>
+              <a:cxn ang="0">
+                <a:pos x="connsiteX2" y="connsiteY2"/>
+              </a:cxn>
+              <a:cxn ang="0">
+                <a:pos x="connsiteX3" y="connsiteY3"/>
+              </a:cxn>
+              <a:cxn ang="0">
+                <a:pos x="connsiteX4" y="connsiteY4"/>
+              </a:cxn>
+              <a:cxn ang="0">
+                <a:pos x="connsiteX5" y="connsiteY5"/>
+              </a:cxn>
+              <a:cxn ang="0">
+                <a:pos x="connsiteX6" y="connsiteY6"/>
+              </a:cxn>
+              <a:cxn ang="0">
+                <a:pos x="connsiteX7" y="connsiteY7"/>
+              </a:cxn>
+              <a:cxn ang="0">
+                <a:pos x="connsiteX8" y="connsiteY8"/>
+              </a:cxn>
+              <a:cxn ang="0">
+                <a:pos x="connsiteX9" y="connsiteY9"/>
+              </a:cxn>
+              <a:cxn ang="0">
+                <a:pos x="connsiteX10" y="connsiteY10"/>
+              </a:cxn>
+              <a:cxn ang="0">
+                <a:pos x="connsiteX11" y="connsiteY11"/>
+              </a:cxn>
+              <a:cxn ang="0">
+                <a:pos x="connsiteX12" y="connsiteY12"/>
+              </a:cxn>
+              <a:cxn ang="0">
+                <a:pos x="connsiteX13" y="connsiteY13"/>
+              </a:cxn>
+              <a:cxn ang="0">
+                <a:pos x="connsiteX14" y="connsiteY14"/>
+              </a:cxn>
+              <a:cxn ang="0">
+                <a:pos x="connsiteX15" y="connsiteY15"/>
+              </a:cxn>
+              <a:cxn ang="0">
+                <a:pos x="connsiteX16" y="connsiteY16"/>
+              </a:cxn>
+            </a:cxnLst>
+            <a:rect l="l" t="t" r="r" b="b"/>
+            <a:pathLst>
+              <a:path w="139039" h="139039">
+                <a:moveTo>
+                  <a:pt x="129602" y="60082"/>
+                </a:moveTo>
+                <a:lnTo>
+                  <a:pt x="78957" y="60082"/>
+                </a:lnTo>
+                <a:lnTo>
+                  <a:pt x="78957" y="9437"/>
+                </a:lnTo>
+                <a:cubicBezTo>
+                  <a:pt x="78957" y="4225"/>
+                  <a:pt x="74731" y="0"/>
+                  <a:pt x="69520" y="0"/>
+                </a:cubicBezTo>
+                <a:cubicBezTo>
+                  <a:pt x="64308" y="0"/>
+                  <a:pt x="60082" y="4225"/>
+                  <a:pt x="60082" y="9437"/>
+                </a:cubicBezTo>
+                <a:lnTo>
+                  <a:pt x="60082" y="60082"/>
+                </a:lnTo>
+                <a:lnTo>
+                  <a:pt x="9437" y="60082"/>
+                </a:lnTo>
+                <a:cubicBezTo>
+                  <a:pt x="4225" y="60082"/>
+                  <a:pt x="0" y="64308"/>
+                  <a:pt x="0" y="69520"/>
+                </a:cubicBezTo>
+                <a:cubicBezTo>
+                  <a:pt x="0" y="74731"/>
+                  <a:pt x="4225" y="78957"/>
+                  <a:pt x="9437" y="78957"/>
+                </a:cubicBezTo>
+                <a:lnTo>
+                  <a:pt x="60082" y="78957"/>
+                </a:lnTo>
+                <a:lnTo>
+                  <a:pt x="60082" y="129602"/>
+                </a:lnTo>
+                <a:cubicBezTo>
+                  <a:pt x="60082" y="134814"/>
+                  <a:pt x="64308" y="139039"/>
+                  <a:pt x="69520" y="139039"/>
+                </a:cubicBezTo>
+                <a:cubicBezTo>
+                  <a:pt x="74731" y="139039"/>
+                  <a:pt x="78957" y="134814"/>
+                  <a:pt x="78957" y="129602"/>
+                </a:cubicBezTo>
+                <a:lnTo>
+                  <a:pt x="78957" y="78957"/>
+                </a:lnTo>
+                <a:lnTo>
+                  <a:pt x="129602" y="78957"/>
+                </a:lnTo>
+                <a:cubicBezTo>
+                  <a:pt x="134814" y="78957"/>
+                  <a:pt x="139039" y="74731"/>
+                  <a:pt x="139039" y="69520"/>
+                </a:cubicBezTo>
+                <a:cubicBezTo>
+                  <a:pt x="139039" y="64308"/>
+                  <a:pt x="134814" y="60082"/>
+                  <a:pt x="129602" y="60082"/>
+                </a:cubicBezTo>
+                <a:close/>
+              </a:path>
+            </a:pathLst>
+          </a:custGeom>
+          <a:solidFill>
+            <a:schemeClr val="accent1"/>
+          </a:solidFill>
+          <a:ln w="603" cap="flat">
+            <a:noFill/>
+            <a:prstDash val="solid"/>
+            <a:miter/>
+          </a:ln>
+        </p:spPr>
+        <p:txBody>
+          <a:bodyPr rtlCol="0" anchor="ctr"/>
+          <a:lstStyle/>
+          <a:p>
+            <a:endParaRPr lang="en-US"/>
+          </a:p>
+        </p:txBody>
+      </p:sp>
+      <p:sp>
+        <p:nvSpPr>
+          <p:cNvPr id="17" name="Graphic 10">
+            <a:extLst>
+              <a:ext uri="{FF2B5EF4-FFF2-40B4-BE49-F238E27FC236}">
+                <a16:creationId xmlns:a16="http://schemas.microsoft.com/office/drawing/2014/main" id="{E3020543-B24B-4EC4-8FFC-8DD88EEA91A8}"/>
+              </a:ext>
+              <a:ext uri="{C183D7F6-B498-43B3-948B-1728B52AA6E4}">
+                <adec:decorative xmlns:adec="http://schemas.microsoft.com/office/drawing/2017/decorative" val="1"/>
+              </a:ext>
+            </a:extLst>
+          </p:cNvPr>
+          <p:cNvSpPr>
+            <a:spLocks noGrp="1" noRot="1" noChangeAspect="1" noMove="1" noResize="1" noEditPoints="1" noAdjustHandles="1" noChangeArrowheads="1" noChangeShapeType="1" noTextEdit="1"/>
+          </p:cNvSpPr>
+          <p:nvPr>
+            <p:extLst>
+              <p:ext uri="{386F3935-93C4-4BCD-93E2-E3B085C9AB24}">
+                <p16:designElem xmlns:p16="http://schemas.microsoft.com/office/powerpoint/2015/main" val="1"/>
+              </p:ext>
+            </p:extLst>
+          </p:nvPr>
+        </p:nvSpPr>
+        <p:spPr>
+          <a:xfrm>
+            <a:off x="11236862" y="2189928"/>
+            <a:ext cx="91138" cy="91138"/>
+          </a:xfrm>
+          <a:custGeom>
+            <a:avLst/>
+            <a:gdLst>
+              <a:gd name="connsiteX0" fmla="*/ 91138 w 91138"/>
+              <a:gd name="connsiteY0" fmla="*/ 45569 h 91138"/>
+              <a:gd name="connsiteX1" fmla="*/ 45569 w 91138"/>
+              <a:gd name="connsiteY1" fmla="*/ 91138 h 91138"/>
+              <a:gd name="connsiteX2" fmla="*/ 0 w 91138"/>
+              <a:gd name="connsiteY2" fmla="*/ 45569 h 91138"/>
+              <a:gd name="connsiteX3" fmla="*/ 45569 w 91138"/>
+              <a:gd name="connsiteY3" fmla="*/ 0 h 91138"/>
+              <a:gd name="connsiteX4" fmla="*/ 91138 w 91138"/>
+              <a:gd name="connsiteY4" fmla="*/ 45569 h 91138"/>
+            </a:gdLst>
+            <a:ahLst/>
+            <a:cxnLst>
+              <a:cxn ang="0">
+                <a:pos x="connsiteX0" y="connsiteY0"/>
+              </a:cxn>
+              <a:cxn ang="0">
+                <a:pos x="connsiteX1" y="connsiteY1"/>
+              </a:cxn>
+              <a:cxn ang="0">
+                <a:pos x="connsiteX2" y="connsiteY2"/>
+              </a:cxn>
+              <a:cxn ang="0">
+                <a:pos x="connsiteX3" y="connsiteY3"/>
+              </a:cxn>
+              <a:cxn ang="0">
+                <a:pos x="connsiteX4" y="connsiteY4"/>
+              </a:cxn>
+            </a:cxnLst>
+            <a:rect l="l" t="t" r="r" b="b"/>
+            <a:pathLst>
+              <a:path w="91138" h="91138">
+                <a:moveTo>
+                  <a:pt x="91138" y="45569"/>
+                </a:moveTo>
+                <a:cubicBezTo>
+                  <a:pt x="91138" y="70736"/>
+                  <a:pt x="70736" y="91138"/>
+                  <a:pt x="45569" y="91138"/>
+                </a:cubicBezTo>
+                <a:cubicBezTo>
+                  <a:pt x="20402" y="91138"/>
+                  <a:pt x="0" y="70736"/>
+                  <a:pt x="0" y="45569"/>
+                </a:cubicBezTo>
+                <a:cubicBezTo>
+                  <a:pt x="0" y="20402"/>
+                  <a:pt x="20402" y="0"/>
+                  <a:pt x="45569" y="0"/>
+                </a:cubicBezTo>
+                <a:cubicBezTo>
+                  <a:pt x="70736" y="0"/>
+                  <a:pt x="91138" y="20402"/>
+                  <a:pt x="91138" y="45569"/>
+                </a:cubicBezTo>
+                <a:close/>
+              </a:path>
+            </a:pathLst>
+          </a:custGeom>
+          <a:solidFill>
+            <a:schemeClr val="accent1"/>
+          </a:solidFill>
+          <a:ln w="422" cap="flat">
+            <a:noFill/>
+            <a:prstDash val="solid"/>
+            <a:miter/>
+          </a:ln>
+        </p:spPr>
+        <p:txBody>
+          <a:bodyPr rtlCol="0" anchor="ctr"/>
+          <a:lstStyle/>
+          <a:p>
+            <a:endParaRPr lang="en-US"/>
+          </a:p>
+        </p:txBody>
+      </p:sp>
+    </p:spTree>
+    <p:extLst>
+      <p:ext uri="{BB962C8B-B14F-4D97-AF65-F5344CB8AC3E}">
+        <p14:creationId xmlns:p14="http://schemas.microsoft.com/office/powerpoint/2010/main" val="1322841244"/>
+      </p:ext>
+    </p:extLst>
+  </p:cSld>
+  <p:clrMapOvr>
+    <a:masterClrMapping/>
+  </p:clrMapOvr>
+</p:sld>
+</file>
+
+<file path=ppt/slides/slide8.xml><?xml version="1.0" encoding="utf-8"?>
+<p:sld xmlns:a="http://schemas.openxmlformats.org/drawingml/2006/main" xmlns:r="http://schemas.openxmlformats.org/officeDocument/2006/relationships" xmlns:p="http://schemas.openxmlformats.org/presentationml/2006/main">
+  <p:cSld>
+    <p:bg>
+      <p:bgPr>
+        <a:solidFill>
+          <a:srgbClr val="ADD3F5"/>
+        </a:solidFill>
+        <a:effectLst/>
+      </p:bgPr>
+    </p:bg>
+    <p:spTree>
+      <p:nvGrpSpPr>
+        <p:cNvPr id="1" name=""/>
+        <p:cNvGrpSpPr/>
+        <p:nvPr/>
+      </p:nvGrpSpPr>
+      <p:grpSpPr>
+        <a:xfrm>
+          <a:off x="0" y="0"/>
+          <a:ext cx="0" cy="0"/>
+          <a:chOff x="0" y="0"/>
+          <a:chExt cx="0" cy="0"/>
+        </a:xfrm>
+      </p:grpSpPr>
+      <p:sp useBgFill="1">
+        <p:nvSpPr>
+          <p:cNvPr id="11" name="Rectangle 10">
+            <a:extLst>
+              <a:ext uri="{FF2B5EF4-FFF2-40B4-BE49-F238E27FC236}">
+                <a16:creationId xmlns:a16="http://schemas.microsoft.com/office/drawing/2014/main" id="{8D1AA55E-40D5-461B-A5A8-4AE8AAB71B08}"/>
+              </a:ext>
+              <a:ext uri="{C183D7F6-B498-43B3-948B-1728B52AA6E4}">
+                <adec:decorative xmlns:adec="http://schemas.microsoft.com/office/drawing/2017/decorative" val="1"/>
+              </a:ext>
+            </a:extLst>
+          </p:cNvPr>
+          <p:cNvSpPr>
+            <a:spLocks noGrp="1" noRot="1" noChangeAspect="1" noMove="1" noResize="1" noEditPoints="1" noAdjustHandles="1" noChangeArrowheads="1" noChangeShapeType="1" noTextEdit="1"/>
+          </p:cNvSpPr>
+          <p:nvPr>
+            <p:extLst>
+              <p:ext uri="{386F3935-93C4-4BCD-93E2-E3B085C9AB24}">
+                <p16:designElem xmlns:p16="http://schemas.microsoft.com/office/powerpoint/2015/main" val="1"/>
+              </p:ext>
+            </p:extLst>
+          </p:nvPr>
+        </p:nvSpPr>
+        <p:spPr>
+          <a:xfrm>
+            <a:off x="0" y="0"/>
+            <a:ext cx="12192000" cy="6858000"/>
+          </a:xfrm>
+          <a:prstGeom prst="rect">
+            <a:avLst/>
+          </a:prstGeom>
+          <a:ln>
+            <a:noFill/>
+          </a:ln>
+        </p:spPr>
+        <p:style>
+          <a:lnRef idx="2">
+            <a:schemeClr val="accent1">
+              <a:shade val="50000"/>
+            </a:schemeClr>
+          </a:lnRef>
+          <a:fillRef idx="1">
+            <a:schemeClr val="accent1"/>
+          </a:fillRef>
+          <a:effectRef idx="0">
+            <a:schemeClr val="accent1"/>
+          </a:effectRef>
+          <a:fontRef idx="minor">
+            <a:schemeClr val="lt1"/>
+          </a:fontRef>
+        </p:style>
+        <p:txBody>
+          <a:bodyPr rtlCol="0" anchor="ctr"/>
+          <a:lstStyle/>
+          <a:p>
+            <a:pPr algn="ctr"/>
+            <a:endParaRPr lang="en-US" dirty="0"/>
+          </a:p>
+        </p:txBody>
+      </p:sp>
+      <p:sp>
+        <p:nvSpPr>
+          <p:cNvPr id="2" name="Title 1">
+            <a:extLst>
+              <a:ext uri="{FF2B5EF4-FFF2-40B4-BE49-F238E27FC236}">
+                <a16:creationId xmlns:a16="http://schemas.microsoft.com/office/drawing/2014/main" id="{D4DBDCE3-1A7C-CD50-16D4-E940F963FBA6}"/>
+              </a:ext>
+            </a:extLst>
+          </p:cNvPr>
+          <p:cNvSpPr>
+            <a:spLocks noGrp="1"/>
+          </p:cNvSpPr>
+          <p:nvPr>
+            <p:ph type="title"/>
+          </p:nvPr>
+        </p:nvSpPr>
+        <p:spPr>
+          <a:xfrm>
+            <a:off x="838200" y="1336390"/>
+            <a:ext cx="6155988" cy="1182927"/>
+          </a:xfrm>
+        </p:spPr>
+        <p:txBody>
+          <a:bodyPr anchor="b">
+            <a:normAutofit/>
+          </a:bodyPr>
+          <a:lstStyle/>
+          <a:p>
+            <a:r>
+              <a:rPr lang="en-CA" sz="5600">
+                <a:latin typeface="Amasis MT Pro Black"/>
+              </a:rPr>
+              <a:t>Task Detail Page</a:t>
+            </a:r>
+            <a:endParaRPr lang="en-US" sz="5600"/>
+          </a:p>
+        </p:txBody>
+      </p:sp>
+      <p:cxnSp>
+        <p:nvCxnSpPr>
+          <p:cNvPr id="13" name="Straight Connector 12">
+            <a:extLst>
+              <a:ext uri="{FF2B5EF4-FFF2-40B4-BE49-F238E27FC236}">
+                <a16:creationId xmlns:a16="http://schemas.microsoft.com/office/drawing/2014/main" id="{7EB498BD-8089-4626-91EA-4978EBEF535E}"/>
+              </a:ext>
+              <a:ext uri="{C183D7F6-B498-43B3-948B-1728B52AA6E4}">
+                <adec:decorative xmlns:adec="http://schemas.microsoft.com/office/drawing/2017/decorative" val="1"/>
+              </a:ext>
+            </a:extLst>
+          </p:cNvPr>
+          <p:cNvCxnSpPr>
+            <a:cxnSpLocks noGrp="1" noRot="1" noChangeAspect="1" noMove="1" noResize="1" noEditPoints="1" noAdjustHandles="1" noChangeArrowheads="1" noChangeShapeType="1"/>
+          </p:cNvCxnSpPr>
+          <p:nvPr>
+            <p:extLst>
+              <p:ext uri="{386F3935-93C4-4BCD-93E2-E3B085C9AB24}">
+                <p16:designElem xmlns:p16="http://schemas.microsoft.com/office/powerpoint/2015/main" val="1"/>
+              </p:ext>
+            </p:extLst>
+          </p:nvPr>
+        </p:nvCxnSpPr>
+        <p:spPr>
+          <a:xfrm>
+            <a:off x="0" y="806470"/>
+            <a:ext cx="7903723" cy="0"/>
+          </a:xfrm>
+          <a:prstGeom prst="line">
+            <a:avLst/>
+          </a:prstGeom>
+          <a:ln w="25400" cap="sq">
+            <a:gradFill flip="none" rotWithShape="1">
+              <a:gsLst>
+                <a:gs pos="0">
+                  <a:schemeClr val="accent1"/>
+                </a:gs>
+                <a:gs pos="100000">
+                  <a:schemeClr val="accent2"/>
+                </a:gs>
+              </a:gsLst>
+              <a:lin ang="10800000" scaled="0"/>
+              <a:tileRect/>
+            </a:gradFill>
+            <a:bevel/>
+          </a:ln>
+        </p:spPr>
+        <p:style>
+          <a:lnRef idx="1">
+            <a:schemeClr val="accent1"/>
+          </a:lnRef>
+          <a:fillRef idx="0">
+            <a:schemeClr val="accent1"/>
+          </a:fillRef>
+          <a:effectRef idx="0">
+            <a:schemeClr val="accent1"/>
+          </a:effectRef>
+          <a:fontRef idx="minor">
+            <a:schemeClr val="tx1"/>
+          </a:fontRef>
+        </p:style>
+      </p:cxnSp>
+      <p:sp>
+        <p:nvSpPr>
+          <p:cNvPr id="8" name="Content Placeholder 7">
+            <a:extLst>
+              <a:ext uri="{FF2B5EF4-FFF2-40B4-BE49-F238E27FC236}">
+                <a16:creationId xmlns:a16="http://schemas.microsoft.com/office/drawing/2014/main" id="{07B6FD52-7C4C-01F0-EDD4-4D91CE049DC0}"/>
+              </a:ext>
+            </a:extLst>
+          </p:cNvPr>
+          <p:cNvSpPr>
+            <a:spLocks noGrp="1"/>
+          </p:cNvSpPr>
+          <p:nvPr>
+            <p:ph idx="1"/>
+          </p:nvPr>
+        </p:nvSpPr>
+        <p:spPr>
+          <a:xfrm>
+            <a:off x="803776" y="2829330"/>
+            <a:ext cx="6190412" cy="3344459"/>
+          </a:xfrm>
+        </p:spPr>
+        <p:txBody>
+          <a:bodyPr anchor="t">
+            <a:normAutofit/>
+          </a:bodyPr>
+          <a:lstStyle/>
+          <a:p>
+            <a:pPr marL="0" indent="0">
+              <a:buNone/>
+            </a:pPr>
+            <a:r>
+              <a:rPr lang="en-US" b="1">
+                <a:solidFill>
+                  <a:schemeClr val="tx1">
+                    <a:alpha val="80000"/>
+                  </a:schemeClr>
+                </a:solidFill>
+              </a:rPr>
+              <a:t>Features:</a:t>
+            </a:r>
+          </a:p>
+          <a:p>
+            <a:r>
+              <a:rPr lang="en-US" sz="2200">
+                <a:solidFill>
+                  <a:schemeClr val="tx1">
+                    <a:alpha val="80000"/>
+                  </a:schemeClr>
+                </a:solidFill>
+              </a:rPr>
+              <a:t>Task information</a:t>
+            </a:r>
+          </a:p>
+          <a:p>
+            <a:r>
+              <a:rPr lang="en-US" sz="2200">
+                <a:solidFill>
+                  <a:schemeClr val="tx1">
+                    <a:alpha val="80000"/>
+                  </a:schemeClr>
+                </a:solidFill>
+              </a:rPr>
+              <a:t>Completed Button</a:t>
+            </a:r>
+            <a:endParaRPr lang="en-US" sz="2200" dirty="0">
+              <a:solidFill>
+                <a:schemeClr val="tx1">
+                  <a:alpha val="80000"/>
+                </a:schemeClr>
+              </a:solidFill>
+            </a:endParaRPr>
+          </a:p>
+          <a:p>
+            <a:r>
+              <a:rPr lang="en-US" sz="2200">
+                <a:solidFill>
+                  <a:schemeClr val="tx1">
+                    <a:alpha val="80000"/>
+                  </a:schemeClr>
+                </a:solidFill>
+              </a:rPr>
+              <a:t>Edit Task Button</a:t>
+            </a:r>
+            <a:endParaRPr lang="en-US" sz="2200"/>
+          </a:p>
+          <a:p>
+            <a:r>
+              <a:rPr lang="en-US" sz="2200">
+                <a:solidFill>
+                  <a:schemeClr val="tx1">
+                    <a:alpha val="80000"/>
+                  </a:schemeClr>
+                </a:solidFill>
+              </a:rPr>
+              <a:t>Delete Task Button</a:t>
+            </a:r>
+            <a:endParaRPr lang="en-US"/>
+          </a:p>
+          <a:p>
+            <a:pPr marL="0" indent="0">
+              <a:buNone/>
+            </a:pPr>
+            <a:endParaRPr lang="en-US" sz="2200" dirty="0">
+              <a:solidFill>
+                <a:srgbClr val="000000">
+                  <a:alpha val="80000"/>
+                </a:srgbClr>
+              </a:solidFill>
+            </a:endParaRPr>
+          </a:p>
+          <a:p>
+            <a:pPr marL="0" indent="0">
+              <a:buNone/>
+            </a:pPr>
+            <a:endParaRPr lang="en-US" sz="2200" dirty="0">
+              <a:solidFill>
+                <a:schemeClr val="tx1">
+                  <a:alpha val="80000"/>
+                </a:schemeClr>
+              </a:solidFill>
+            </a:endParaRPr>
+          </a:p>
+          <a:p>
+            <a:pPr marL="0" indent="0">
+              <a:buNone/>
+            </a:pPr>
+            <a:endParaRPr lang="en-US" sz="2200" dirty="0">
+              <a:solidFill>
+                <a:schemeClr val="tx1">
+                  <a:alpha val="80000"/>
+                </a:schemeClr>
+              </a:solidFill>
+            </a:endParaRPr>
+          </a:p>
+        </p:txBody>
+      </p:sp>
+      <p:pic>
+        <p:nvPicPr>
+          <p:cNvPr id="4" name="Content Placeholder 3" descr="A screenshot of a cell phone&#10;&#10;AI-generated content may be incorrect.">
+            <a:extLst>
+              <a:ext uri="{FF2B5EF4-FFF2-40B4-BE49-F238E27FC236}">
+                <a16:creationId xmlns:a16="http://schemas.microsoft.com/office/drawing/2014/main" id="{AAF643BA-2480-F250-3B80-906354928272}"/>
+              </a:ext>
+            </a:extLst>
+          </p:cNvPr>
+          <p:cNvPicPr>
+            <a:picLocks noChangeAspect="1"/>
+          </p:cNvPicPr>
+          <p:nvPr/>
+        </p:nvPicPr>
+        <p:blipFill>
+          <a:blip r:embed="rId2"/>
+          <a:stretch>
+            <a:fillRect/>
+          </a:stretch>
+        </p:blipFill>
+        <p:spPr>
+          <a:xfrm>
+            <a:off x="7992385" y="1336390"/>
+            <a:ext cx="2708940" cy="4837394"/>
+          </a:xfrm>
+          <a:prstGeom prst="rect">
+            <a:avLst/>
+          </a:prstGeom>
+        </p:spPr>
+      </p:pic>
+      <p:sp>
+        <p:nvSpPr>
+          <p:cNvPr id="15" name="Graphic 11">
+            <a:extLst>
+              <a:ext uri="{FF2B5EF4-FFF2-40B4-BE49-F238E27FC236}">
+                <a16:creationId xmlns:a16="http://schemas.microsoft.com/office/drawing/2014/main" id="{6CB927A4-E432-4310-9CD5-E89FF5063179}"/>
+              </a:ext>
+              <a:ext uri="{C183D7F6-B498-43B3-948B-1728B52AA6E4}">
+                <adec:decorative xmlns:adec="http://schemas.microsoft.com/office/drawing/2017/decorative" val="1"/>
+              </a:ext>
+            </a:extLst>
+          </p:cNvPr>
+          <p:cNvSpPr>
+            <a:spLocks noGrp="1" noRot="1" noChangeAspect="1" noMove="1" noResize="1" noEditPoints="1" noAdjustHandles="1" noChangeArrowheads="1" noChangeShapeType="1" noTextEdit="1"/>
+          </p:cNvSpPr>
+          <p:nvPr>
+            <p:extLst>
+              <p:ext uri="{386F3935-93C4-4BCD-93E2-E3B085C9AB24}">
+                <p16:designElem xmlns:p16="http://schemas.microsoft.com/office/powerpoint/2015/main" val="1"/>
+              </p:ext>
+            </p:extLst>
+          </p:nvPr>
+        </p:nvSpPr>
+        <p:spPr>
+          <a:xfrm>
+            <a:off x="10924552" y="1899284"/>
+            <a:ext cx="139039" cy="139039"/>
+          </a:xfrm>
+          <a:custGeom>
+            <a:avLst/>
+            <a:gdLst>
+              <a:gd name="connsiteX0" fmla="*/ 129602 w 139039"/>
+              <a:gd name="connsiteY0" fmla="*/ 60082 h 139039"/>
+              <a:gd name="connsiteX1" fmla="*/ 78957 w 139039"/>
+              <a:gd name="connsiteY1" fmla="*/ 60082 h 139039"/>
+              <a:gd name="connsiteX2" fmla="*/ 78957 w 139039"/>
+              <a:gd name="connsiteY2" fmla="*/ 9437 h 139039"/>
+              <a:gd name="connsiteX3" fmla="*/ 69520 w 139039"/>
+              <a:gd name="connsiteY3" fmla="*/ 0 h 139039"/>
+              <a:gd name="connsiteX4" fmla="*/ 60082 w 139039"/>
+              <a:gd name="connsiteY4" fmla="*/ 9437 h 139039"/>
+              <a:gd name="connsiteX5" fmla="*/ 60082 w 139039"/>
+              <a:gd name="connsiteY5" fmla="*/ 60082 h 139039"/>
+              <a:gd name="connsiteX6" fmla="*/ 9437 w 139039"/>
+              <a:gd name="connsiteY6" fmla="*/ 60082 h 139039"/>
+              <a:gd name="connsiteX7" fmla="*/ 0 w 139039"/>
+              <a:gd name="connsiteY7" fmla="*/ 69520 h 139039"/>
+              <a:gd name="connsiteX8" fmla="*/ 9437 w 139039"/>
+              <a:gd name="connsiteY8" fmla="*/ 78957 h 139039"/>
+              <a:gd name="connsiteX9" fmla="*/ 60082 w 139039"/>
+              <a:gd name="connsiteY9" fmla="*/ 78957 h 139039"/>
+              <a:gd name="connsiteX10" fmla="*/ 60082 w 139039"/>
+              <a:gd name="connsiteY10" fmla="*/ 129602 h 139039"/>
+              <a:gd name="connsiteX11" fmla="*/ 69520 w 139039"/>
+              <a:gd name="connsiteY11" fmla="*/ 139039 h 139039"/>
+              <a:gd name="connsiteX12" fmla="*/ 78957 w 139039"/>
+              <a:gd name="connsiteY12" fmla="*/ 129602 h 139039"/>
+              <a:gd name="connsiteX13" fmla="*/ 78957 w 139039"/>
+              <a:gd name="connsiteY13" fmla="*/ 78957 h 139039"/>
+              <a:gd name="connsiteX14" fmla="*/ 129602 w 139039"/>
+              <a:gd name="connsiteY14" fmla="*/ 78957 h 139039"/>
+              <a:gd name="connsiteX15" fmla="*/ 139039 w 139039"/>
+              <a:gd name="connsiteY15" fmla="*/ 69520 h 139039"/>
+              <a:gd name="connsiteX16" fmla="*/ 129602 w 139039"/>
+              <a:gd name="connsiteY16" fmla="*/ 60082 h 139039"/>
+            </a:gdLst>
+            <a:ahLst/>
+            <a:cxnLst>
+              <a:cxn ang="0">
+                <a:pos x="connsiteX0" y="connsiteY0"/>
+              </a:cxn>
+              <a:cxn ang="0">
+                <a:pos x="connsiteX1" y="connsiteY1"/>
+              </a:cxn>
+              <a:cxn ang="0">
+                <a:pos x="connsiteX2" y="connsiteY2"/>
+              </a:cxn>
+              <a:cxn ang="0">
+                <a:pos x="connsiteX3" y="connsiteY3"/>
+              </a:cxn>
+              <a:cxn ang="0">
+                <a:pos x="connsiteX4" y="connsiteY4"/>
+              </a:cxn>
+              <a:cxn ang="0">
+                <a:pos x="connsiteX5" y="connsiteY5"/>
+              </a:cxn>
+              <a:cxn ang="0">
+                <a:pos x="connsiteX6" y="connsiteY6"/>
+              </a:cxn>
+              <a:cxn ang="0">
+                <a:pos x="connsiteX7" y="connsiteY7"/>
+              </a:cxn>
+              <a:cxn ang="0">
+                <a:pos x="connsiteX8" y="connsiteY8"/>
+              </a:cxn>
+              <a:cxn ang="0">
+                <a:pos x="connsiteX9" y="connsiteY9"/>
+              </a:cxn>
+              <a:cxn ang="0">
+                <a:pos x="connsiteX10" y="connsiteY10"/>
+              </a:cxn>
+              <a:cxn ang="0">
+                <a:pos x="connsiteX11" y="connsiteY11"/>
+              </a:cxn>
+              <a:cxn ang="0">
+                <a:pos x="connsiteX12" y="connsiteY12"/>
+              </a:cxn>
+              <a:cxn ang="0">
+                <a:pos x="connsiteX13" y="connsiteY13"/>
+              </a:cxn>
+              <a:cxn ang="0">
+                <a:pos x="connsiteX14" y="connsiteY14"/>
+              </a:cxn>
+              <a:cxn ang="0">
+                <a:pos x="connsiteX15" y="connsiteY15"/>
+              </a:cxn>
+              <a:cxn ang="0">
+                <a:pos x="connsiteX16" y="connsiteY16"/>
+              </a:cxn>
+            </a:cxnLst>
+            <a:rect l="l" t="t" r="r" b="b"/>
+            <a:pathLst>
+              <a:path w="139039" h="139039">
+                <a:moveTo>
+                  <a:pt x="129602" y="60082"/>
+                </a:moveTo>
+                <a:lnTo>
+                  <a:pt x="78957" y="60082"/>
+                </a:lnTo>
+                <a:lnTo>
+                  <a:pt x="78957" y="9437"/>
+                </a:lnTo>
+                <a:cubicBezTo>
+                  <a:pt x="78957" y="4225"/>
+                  <a:pt x="74731" y="0"/>
+                  <a:pt x="69520" y="0"/>
+                </a:cubicBezTo>
+                <a:cubicBezTo>
+                  <a:pt x="64308" y="0"/>
+                  <a:pt x="60082" y="4225"/>
+                  <a:pt x="60082" y="9437"/>
+                </a:cubicBezTo>
+                <a:lnTo>
+                  <a:pt x="60082" y="60082"/>
+                </a:lnTo>
+                <a:lnTo>
+                  <a:pt x="9437" y="60082"/>
+                </a:lnTo>
+                <a:cubicBezTo>
+                  <a:pt x="4225" y="60082"/>
+                  <a:pt x="0" y="64308"/>
+                  <a:pt x="0" y="69520"/>
+                </a:cubicBezTo>
+                <a:cubicBezTo>
+                  <a:pt x="0" y="74731"/>
+                  <a:pt x="4225" y="78957"/>
+                  <a:pt x="9437" y="78957"/>
+                </a:cubicBezTo>
+                <a:lnTo>
+                  <a:pt x="60082" y="78957"/>
+                </a:lnTo>
+                <a:lnTo>
+                  <a:pt x="60082" y="129602"/>
+                </a:lnTo>
+                <a:cubicBezTo>
+                  <a:pt x="60082" y="134814"/>
+                  <a:pt x="64308" y="139039"/>
+                  <a:pt x="69520" y="139039"/>
+                </a:cubicBezTo>
+                <a:cubicBezTo>
+                  <a:pt x="74731" y="139039"/>
+                  <a:pt x="78957" y="134814"/>
+                  <a:pt x="78957" y="129602"/>
+                </a:cubicBezTo>
+                <a:lnTo>
+                  <a:pt x="78957" y="78957"/>
+                </a:lnTo>
+                <a:lnTo>
+                  <a:pt x="129602" y="78957"/>
+                </a:lnTo>
+                <a:cubicBezTo>
+                  <a:pt x="134814" y="78957"/>
+                  <a:pt x="139039" y="74731"/>
+                  <a:pt x="139039" y="69520"/>
+                </a:cubicBezTo>
+                <a:cubicBezTo>
+                  <a:pt x="139039" y="64308"/>
+                  <a:pt x="134814" y="60082"/>
+                  <a:pt x="129602" y="60082"/>
+                </a:cubicBezTo>
+                <a:close/>
+              </a:path>
+            </a:pathLst>
+          </a:custGeom>
+          <a:solidFill>
+            <a:schemeClr val="accent1"/>
+          </a:solidFill>
+          <a:ln w="603" cap="flat">
+            <a:noFill/>
+            <a:prstDash val="solid"/>
+            <a:miter/>
+          </a:ln>
+        </p:spPr>
+        <p:txBody>
+          <a:bodyPr rtlCol="0" anchor="ctr"/>
+          <a:lstStyle/>
+          <a:p>
+            <a:endParaRPr lang="en-US"/>
+          </a:p>
+        </p:txBody>
+      </p:sp>
+      <p:sp>
+        <p:nvSpPr>
+          <p:cNvPr id="17" name="Graphic 10">
+            <a:extLst>
+              <a:ext uri="{FF2B5EF4-FFF2-40B4-BE49-F238E27FC236}">
+                <a16:creationId xmlns:a16="http://schemas.microsoft.com/office/drawing/2014/main" id="{E3020543-B24B-4EC4-8FFC-8DD88EEA91A8}"/>
+              </a:ext>
+              <a:ext uri="{C183D7F6-B498-43B3-948B-1728B52AA6E4}">
+                <adec:decorative xmlns:adec="http://schemas.microsoft.com/office/drawing/2017/decorative" val="1"/>
+              </a:ext>
+            </a:extLst>
+          </p:cNvPr>
+          <p:cNvSpPr>
+            <a:spLocks noGrp="1" noRot="1" noChangeAspect="1" noMove="1" noResize="1" noEditPoints="1" noAdjustHandles="1" noChangeArrowheads="1" noChangeShapeType="1" noTextEdit="1"/>
+          </p:cNvSpPr>
+          <p:nvPr>
+            <p:extLst>
+              <p:ext uri="{386F3935-93C4-4BCD-93E2-E3B085C9AB24}">
+                <p16:designElem xmlns:p16="http://schemas.microsoft.com/office/powerpoint/2015/main" val="1"/>
+              </p:ext>
+            </p:extLst>
+          </p:nvPr>
+        </p:nvSpPr>
+        <p:spPr>
+          <a:xfrm>
+            <a:off x="11236862" y="2189928"/>
+            <a:ext cx="91138" cy="91138"/>
+          </a:xfrm>
+          <a:custGeom>
+            <a:avLst/>
+            <a:gdLst>
+              <a:gd name="connsiteX0" fmla="*/ 91138 w 91138"/>
+              <a:gd name="connsiteY0" fmla="*/ 45569 h 91138"/>
+              <a:gd name="connsiteX1" fmla="*/ 45569 w 91138"/>
+              <a:gd name="connsiteY1" fmla="*/ 91138 h 91138"/>
+              <a:gd name="connsiteX2" fmla="*/ 0 w 91138"/>
+              <a:gd name="connsiteY2" fmla="*/ 45569 h 91138"/>
+              <a:gd name="connsiteX3" fmla="*/ 45569 w 91138"/>
+              <a:gd name="connsiteY3" fmla="*/ 0 h 91138"/>
+              <a:gd name="connsiteX4" fmla="*/ 91138 w 91138"/>
+              <a:gd name="connsiteY4" fmla="*/ 45569 h 91138"/>
+            </a:gdLst>
+            <a:ahLst/>
+            <a:cxnLst>
+              <a:cxn ang="0">
+                <a:pos x="connsiteX0" y="connsiteY0"/>
+              </a:cxn>
+              <a:cxn ang="0">
+                <a:pos x="connsiteX1" y="connsiteY1"/>
+              </a:cxn>
+              <a:cxn ang="0">
+                <a:pos x="connsiteX2" y="connsiteY2"/>
+              </a:cxn>
+              <a:cxn ang="0">
+                <a:pos x="connsiteX3" y="connsiteY3"/>
+              </a:cxn>
+              <a:cxn ang="0">
+                <a:pos x="connsiteX4" y="connsiteY4"/>
+              </a:cxn>
+            </a:cxnLst>
+            <a:rect l="l" t="t" r="r" b="b"/>
+            <a:pathLst>
+              <a:path w="91138" h="91138">
+                <a:moveTo>
+                  <a:pt x="91138" y="45569"/>
+                </a:moveTo>
+                <a:cubicBezTo>
+                  <a:pt x="91138" y="70736"/>
+                  <a:pt x="70736" y="91138"/>
+                  <a:pt x="45569" y="91138"/>
+                </a:cubicBezTo>
+                <a:cubicBezTo>
+                  <a:pt x="20402" y="91138"/>
+                  <a:pt x="0" y="70736"/>
+                  <a:pt x="0" y="45569"/>
+                </a:cubicBezTo>
+                <a:cubicBezTo>
+                  <a:pt x="0" y="20402"/>
+                  <a:pt x="20402" y="0"/>
+                  <a:pt x="45569" y="0"/>
+                </a:cubicBezTo>
+                <a:cubicBezTo>
+                  <a:pt x="70736" y="0"/>
+                  <a:pt x="91138" y="20402"/>
+                  <a:pt x="91138" y="45569"/>
+                </a:cubicBezTo>
+                <a:close/>
+              </a:path>
+            </a:pathLst>
+          </a:custGeom>
+          <a:solidFill>
+            <a:schemeClr val="accent1"/>
+          </a:solidFill>
+          <a:ln w="422" cap="flat">
+            <a:noFill/>
+            <a:prstDash val="solid"/>
+            <a:miter/>
+          </a:ln>
+        </p:spPr>
+        <p:txBody>
+          <a:bodyPr rtlCol="0" anchor="ctr"/>
+          <a:lstStyle/>
+          <a:p>
+            <a:endParaRPr lang="en-US"/>
+          </a:p>
+        </p:txBody>
+      </p:sp>
+    </p:spTree>
+    <p:extLst>
+      <p:ext uri="{BB962C8B-B14F-4D97-AF65-F5344CB8AC3E}">
+        <p14:creationId xmlns:p14="http://schemas.microsoft.com/office/powerpoint/2010/main" val="2966578349"/>
+      </p:ext>
+    </p:extLst>
+  </p:cSld>
+  <p:clrMapOvr>
+    <a:masterClrMapping/>
+  </p:clrMapOvr>
+</p:sld>
+</file>
+
+<file path=ppt/slides/slide9.xml><?xml version="1.0" encoding="utf-8"?>
 <p:sld xmlns:a="http://schemas.openxmlformats.org/drawingml/2006/main" xmlns:r="http://schemas.openxmlformats.org/officeDocument/2006/relationships" xmlns:p="http://schemas.openxmlformats.org/presentationml/2006/main">
   <p:cSld>
     <p:spTree>
@@ -3838,32 +8483,106 @@
           <a:bodyPr/>
           <a:lstStyle/>
           <a:p>
+            <a:r>
+              <a:rPr lang="en-CA" sz="6000">
+                <a:latin typeface="Amasis MT Pro Black"/>
+                <a:ea typeface="+mj-lt"/>
+                <a:cs typeface="+mj-lt"/>
+              </a:rPr>
+              <a:t>Limitations</a:t>
+            </a:r>
+            <a:endParaRPr lang="en-US"/>
+          </a:p>
+        </p:txBody>
+      </p:sp>
+      <p:sp>
+        <p:nvSpPr>
+          <p:cNvPr id="3" name="Content Placeholder 2">
+            <a:extLst>
+              <a:ext uri="{FF2B5EF4-FFF2-40B4-BE49-F238E27FC236}">
+                <a16:creationId xmlns:a16="http://schemas.microsoft.com/office/drawing/2014/main" id="{B12EF3BB-1E18-B566-AE83-DA8F15E402E8}"/>
+              </a:ext>
+            </a:extLst>
+          </p:cNvPr>
+          <p:cNvSpPr>
+            <a:spLocks noGrp="1"/>
+          </p:cNvSpPr>
+          <p:nvPr>
+            <p:ph idx="1"/>
+          </p:nvPr>
+        </p:nvSpPr>
+        <p:spPr>
+          <a:xfrm>
+            <a:off x="838200" y="1287145"/>
+            <a:ext cx="10515600" cy="4889818"/>
+          </a:xfrm>
+        </p:spPr>
+        <p:txBody>
+          <a:bodyPr vert="horz" lIns="91440" tIns="45720" rIns="91440" bIns="45720" rtlCol="0" anchor="t">
+            <a:normAutofit/>
+          </a:bodyPr>
+          <a:lstStyle/>
+          <a:p>
+            <a:pPr marL="0" indent="0">
+              <a:buNone/>
+            </a:pPr>
+            <a:r>
+              <a:rPr lang="en-CA" sz="3200" b="1" i="1"/>
+              <a:t>Current Constraints</a:t>
+            </a:r>
+            <a:endParaRPr lang="en-CA" sz="3200" b="1"/>
+          </a:p>
+          <a:p>
+            <a:pPr marL="0" indent="0">
+              <a:buNone/>
+            </a:pPr>
+            <a:endParaRPr lang="en-CA" sz="3200" i="1" dirty="0">
+              <a:ea typeface="+mn-lt"/>
+              <a:cs typeface="+mn-lt"/>
+            </a:endParaRPr>
+          </a:p>
+          <a:p>
+            <a:r>
+              <a:rPr lang="en-CA">
+                <a:ea typeface="+mn-lt"/>
+                <a:cs typeface="+mn-lt"/>
+              </a:rPr>
+              <a:t>No cloud sync (offline-cached database)</a:t>
+            </a:r>
             <a:endParaRPr lang="en-CA"/>
           </a:p>
-        </p:txBody>
-      </p:sp>
-      <p:sp>
-        <p:nvSpPr>
-          <p:cNvPr id="3" name="Content Placeholder 2">
-            <a:extLst>
-              <a:ext uri="{FF2B5EF4-FFF2-40B4-BE49-F238E27FC236}">
-                <a16:creationId xmlns:a16="http://schemas.microsoft.com/office/drawing/2014/main" id="{B12EF3BB-1E18-B566-AE83-DA8F15E402E8}"/>
-              </a:ext>
-            </a:extLst>
-          </p:cNvPr>
-          <p:cNvSpPr>
-            <a:spLocks noGrp="1"/>
-          </p:cNvSpPr>
-          <p:nvPr>
-            <p:ph idx="1"/>
-          </p:nvPr>
-        </p:nvSpPr>
-        <p:spPr/>
-        <p:txBody>
-          <a:bodyPr/>
-          <a:lstStyle/>
-          <a:p>
+          <a:p>
+            <a:r>
+              <a:rPr lang="en-CA">
+                <a:ea typeface="+mn-lt"/>
+                <a:cs typeface="+mn-lt"/>
+              </a:rPr>
+              <a:t>No user authentication beyond login screen</a:t>
+            </a:r>
             <a:endParaRPr lang="en-CA"/>
+          </a:p>
+          <a:p>
+            <a:r>
+              <a:rPr lang="en-CA">
+                <a:ea typeface="+mn-lt"/>
+                <a:cs typeface="+mn-lt"/>
+              </a:rPr>
+              <a:t>Limited task categories</a:t>
+            </a:r>
+            <a:endParaRPr lang="en-CA"/>
+          </a:p>
+          <a:p>
+            <a:r>
+              <a:rPr lang="en-CA">
+                <a:ea typeface="+mn-lt"/>
+                <a:cs typeface="+mn-lt"/>
+              </a:rPr>
+              <a:t>No notifications or reminders</a:t>
+            </a:r>
+            <a:endParaRPr lang="en-CA"/>
+          </a:p>
+          <a:p>
+            <a:endParaRPr lang="en-CA" dirty="0"/>
           </a:p>
         </p:txBody>
       </p:sp>
